--- a/output/zeta/zeta_enhanced_brand_book.pptx
+++ b/output/zeta/zeta_enhanced_brand_book.pptx
@@ -16,6 +16,7 @@
     <p:sldId id="264" r:id="rId15"/>
     <p:sldId id="265" r:id="rId16"/>
     <p:sldId id="266" r:id="rId17"/>
+    <p:sldId id="267" r:id="rId18"/>
   </p:sldIdLst>
   <p:sldSz cx="9144000" cy="6858000" type="screen4x3"/>
   <p:notesSz cx="6858000" cy="9144000"/>
@@ -3108,7 +3109,7 @@
       <p:grpSpPr/>
       <p:pic>
         <p:nvPicPr>
-          <p:cNvPr id="2" name="Picture 1" descr="zeta_logo_1_20250828_233153_0c4ee81f.png"/>
+          <p:cNvPr id="2" name="Picture 1" descr="zeta_logo_1_20250828_235333_3e1fde11.png"/>
           <p:cNvPicPr>
             <a:picLocks noChangeAspect="1"/>
           </p:cNvPicPr>
@@ -3122,53 +3123,17 @@
         </p:blipFill>
         <p:spPr>
           <a:xfrm>
-            <a:off x="1143000" y="1943100"/>
-            <a:ext cx="1371600" cy="1485900"/>
+            <a:off x="0" y="0"/>
+            <a:ext cx="9144000" cy="6858000"/>
           </a:xfrm>
           <a:prstGeom prst="rect">
             <a:avLst/>
           </a:prstGeom>
         </p:spPr>
       </p:pic>
-      <p:sp>
-        <p:nvSpPr>
-          <p:cNvPr id="3" name="TextBox 2"/>
-          <p:cNvSpPr txBox="1"/>
-          <p:nvPr/>
-        </p:nvSpPr>
-        <p:spPr>
-          <a:xfrm>
-            <a:off x="1143000" y="3800475"/>
-            <a:ext cx="2743200" cy="742950"/>
-          </a:xfrm>
-          <a:prstGeom prst="rect">
-            <a:avLst/>
-          </a:prstGeom>
-          <a:noFill/>
-        </p:spPr>
-        <p:txBody>
-          <a:bodyPr wrap="none" lIns="0" rIns="0" tIns="0" bIns="0">
-            <a:spAutoFit/>
-          </a:bodyPr>
-          <a:lstStyle/>
-          <a:p>
-            <a:pPr algn="l">
-              <a:defRPr sz="3600" b="1">
-                <a:solidFill>
-                  <a:srgbClr val="FFFFFF"/>
-                </a:solidFill>
-                <a:latin typeface="Inter"/>
-              </a:defRPr>
-            </a:pPr>
-            <a:r>
-              <a:t>Zeta</a:t>
-            </a:r>
-          </a:p>
-        </p:txBody>
-      </p:sp>
       <p:cxnSp>
         <p:nvCxnSpPr>
-          <p:cNvPr id="4" name="Connector 3"/>
+          <p:cNvPr id="3" name="Connector 2"/>
           <p:cNvCxnSpPr/>
           <p:nvPr/>
         </p:nvCxnSpPr>
@@ -3203,7 +3168,7 @@
       </p:cxnSp>
       <p:sp>
         <p:nvSpPr>
-          <p:cNvPr id="5" name="TextBox 4"/>
+          <p:cNvPr id="4" name="TextBox 3"/>
           <p:cNvSpPr txBox="1"/>
           <p:nvPr/>
         </p:nvSpPr>
@@ -3329,21 +3294,686 @@
               </a:defRPr>
             </a:pPr>
             <a:r>
-              <a:t>Typography</a:t>
-            </a:r>
-          </a:p>
-        </p:txBody>
-      </p:sp>
-      <p:sp>
-        <p:nvSpPr>
-          <p:cNvPr id="4" name="TextBox 3"/>
+              <a:t>Color Palette</a:t>
+            </a:r>
+          </a:p>
+        </p:txBody>
+      </p:sp>
+      <p:sp>
+        <p:nvSpPr>
+          <p:cNvPr id="4" name="Rectangle 3"/>
+          <p:cNvSpPr/>
+          <p:nvPr/>
+        </p:nvSpPr>
+        <p:spPr>
+          <a:xfrm>
+            <a:off x="1143000" y="1943100"/>
+            <a:ext cx="2057400" cy="1485900"/>
+          </a:xfrm>
+          <a:prstGeom prst="rect">
+            <a:avLst/>
+          </a:prstGeom>
+          <a:solidFill>
+            <a:srgbClr val="059669"/>
+          </a:solidFill>
+          <a:ln w="12700">
+            <a:solidFill>
+              <a:srgbClr val="FFFFFF"/>
+            </a:solidFill>
+          </a:ln>
+        </p:spPr>
+        <p:style>
+          <a:lnRef idx="1">
+            <a:schemeClr val="accent1"/>
+          </a:lnRef>
+          <a:fillRef idx="3">
+            <a:schemeClr val="accent1"/>
+          </a:fillRef>
+          <a:effectRef idx="2">
+            <a:schemeClr val="accent1"/>
+          </a:effectRef>
+          <a:fontRef idx="minor">
+            <a:schemeClr val="lt1"/>
+          </a:fontRef>
+        </p:style>
+        <p:txBody>
+          <a:bodyPr rtlCol="0" anchor="ctr"/>
+          <a:lstStyle/>
+          <a:p>
+            <a:pPr algn="ctr"/>
+          </a:p>
+        </p:txBody>
+      </p:sp>
+      <p:sp>
+        <p:nvSpPr>
+          <p:cNvPr id="5" name="TextBox 4"/>
           <p:cNvSpPr txBox="1"/>
           <p:nvPr/>
         </p:nvSpPr>
         <p:spPr>
           <a:xfrm>
-            <a:off x="1143000" y="1943100"/>
-            <a:ext cx="3429000" cy="742950"/>
+            <a:off x="1143000" y="3429000"/>
+            <a:ext cx="2057400" cy="1485900"/>
+          </a:xfrm>
+          <a:prstGeom prst="rect">
+            <a:avLst/>
+          </a:prstGeom>
+          <a:noFill/>
+        </p:spPr>
+        <p:txBody>
+          <a:bodyPr wrap="square">
+            <a:spAutoFit/>
+          </a:bodyPr>
+          <a:lstStyle/>
+          <a:p>
+            <a:pPr>
+              <a:defRPr sz="1000" b="0">
+                <a:solidFill>
+                  <a:srgbClr val="059669"/>
+                </a:solidFill>
+                <a:latin typeface="Source Sans Pro"/>
+              </a:defRPr>
+            </a:pPr>
+            <a:r>
+              <a:t>Primary</a:t>
+            </a:r>
+          </a:p>
+          <a:p>
+            <a:pPr>
+              <a:defRPr sz="1000" b="0">
+                <a:solidFill>
+                  <a:srgbClr val="059669"/>
+                </a:solidFill>
+                <a:latin typeface="Source Sans Pro"/>
+              </a:defRPr>
+            </a:pPr>
+            <a:r>
+              <a:t>#059669</a:t>
+            </a:r>
+          </a:p>
+          <a:p>
+            <a:pPr>
+              <a:defRPr sz="1000" b="0">
+                <a:solidFill>
+                  <a:srgbClr val="059669"/>
+                </a:solidFill>
+                <a:latin typeface="Source Sans Pro"/>
+              </a:defRPr>
+            </a:pPr>
+            <a:r>
+              <a:t>RGB(5, 150, 105)</a:t>
+            </a:r>
+          </a:p>
+          <a:p>
+            <a:pPr>
+              <a:defRPr sz="1000" b="0">
+                <a:solidFill>
+                  <a:srgbClr val="059669"/>
+                </a:solidFill>
+                <a:latin typeface="Source Sans Pro"/>
+              </a:defRPr>
+            </a:pPr>
+            <a:r>
+              <a:t>CMYK(96, 0, 30, 41)</a:t>
+            </a:r>
+          </a:p>
+          <a:p>
+            <a:pPr>
+              <a:defRPr sz="1000" b="0">
+                <a:solidFill>
+                  <a:srgbClr val="059669"/>
+                </a:solidFill>
+                <a:latin typeface="Source Sans Pro"/>
+              </a:defRPr>
+            </a:pPr>
+            <a:r>
+              <a:t>Use Light Text</a:t>
+            </a:r>
+          </a:p>
+        </p:txBody>
+      </p:sp>
+      <p:sp>
+        <p:nvSpPr>
+          <p:cNvPr id="6" name="Rectangle 5"/>
+          <p:cNvSpPr/>
+          <p:nvPr/>
+        </p:nvSpPr>
+        <p:spPr>
+          <a:xfrm>
+            <a:off x="3886200" y="1943100"/>
+            <a:ext cx="2057400" cy="1485900"/>
+          </a:xfrm>
+          <a:prstGeom prst="rect">
+            <a:avLst/>
+          </a:prstGeom>
+          <a:solidFill>
+            <a:srgbClr val="8B5CF6"/>
+          </a:solidFill>
+          <a:ln w="12700">
+            <a:solidFill>
+              <a:srgbClr val="FFFFFF"/>
+            </a:solidFill>
+          </a:ln>
+        </p:spPr>
+        <p:style>
+          <a:lnRef idx="1">
+            <a:schemeClr val="accent1"/>
+          </a:lnRef>
+          <a:fillRef idx="3">
+            <a:schemeClr val="accent1"/>
+          </a:fillRef>
+          <a:effectRef idx="2">
+            <a:schemeClr val="accent1"/>
+          </a:effectRef>
+          <a:fontRef idx="minor">
+            <a:schemeClr val="lt1"/>
+          </a:fontRef>
+        </p:style>
+        <p:txBody>
+          <a:bodyPr rtlCol="0" anchor="ctr"/>
+          <a:lstStyle/>
+          <a:p>
+            <a:pPr algn="ctr"/>
+          </a:p>
+        </p:txBody>
+      </p:sp>
+      <p:sp>
+        <p:nvSpPr>
+          <p:cNvPr id="7" name="TextBox 6"/>
+          <p:cNvSpPr txBox="1"/>
+          <p:nvPr/>
+        </p:nvSpPr>
+        <p:spPr>
+          <a:xfrm>
+            <a:off x="3886200" y="3429000"/>
+            <a:ext cx="2057400" cy="1485900"/>
+          </a:xfrm>
+          <a:prstGeom prst="rect">
+            <a:avLst/>
+          </a:prstGeom>
+          <a:noFill/>
+        </p:spPr>
+        <p:txBody>
+          <a:bodyPr wrap="square">
+            <a:spAutoFit/>
+          </a:bodyPr>
+          <a:lstStyle/>
+          <a:p>
+            <a:pPr>
+              <a:defRPr sz="1000" b="0">
+                <a:solidFill>
+                  <a:srgbClr val="059669"/>
+                </a:solidFill>
+                <a:latin typeface="Source Sans Pro"/>
+              </a:defRPr>
+            </a:pPr>
+            <a:r>
+              <a:t>Secondary</a:t>
+            </a:r>
+          </a:p>
+          <a:p>
+            <a:pPr>
+              <a:defRPr sz="1000" b="0">
+                <a:solidFill>
+                  <a:srgbClr val="059669"/>
+                </a:solidFill>
+                <a:latin typeface="Source Sans Pro"/>
+              </a:defRPr>
+            </a:pPr>
+            <a:r>
+              <a:t>#8B5CF6</a:t>
+            </a:r>
+          </a:p>
+          <a:p>
+            <a:pPr>
+              <a:defRPr sz="1000" b="0">
+                <a:solidFill>
+                  <a:srgbClr val="059669"/>
+                </a:solidFill>
+                <a:latin typeface="Source Sans Pro"/>
+              </a:defRPr>
+            </a:pPr>
+            <a:r>
+              <a:t>RGB(139, 92, 246)</a:t>
+            </a:r>
+          </a:p>
+          <a:p>
+            <a:pPr>
+              <a:defRPr sz="1000" b="0">
+                <a:solidFill>
+                  <a:srgbClr val="059669"/>
+                </a:solidFill>
+                <a:latin typeface="Source Sans Pro"/>
+              </a:defRPr>
+            </a:pPr>
+            <a:r>
+              <a:t>CMYK(43, 62, 0, 3)</a:t>
+            </a:r>
+          </a:p>
+          <a:p>
+            <a:pPr>
+              <a:defRPr sz="1000" b="0">
+                <a:solidFill>
+                  <a:srgbClr val="059669"/>
+                </a:solidFill>
+                <a:latin typeface="Source Sans Pro"/>
+              </a:defRPr>
+            </a:pPr>
+            <a:r>
+              <a:t>Use Dark Text</a:t>
+            </a:r>
+          </a:p>
+        </p:txBody>
+      </p:sp>
+      <p:sp>
+        <p:nvSpPr>
+          <p:cNvPr id="8" name="Rectangle 7"/>
+          <p:cNvSpPr/>
+          <p:nvPr/>
+        </p:nvSpPr>
+        <p:spPr>
+          <a:xfrm>
+            <a:off x="6629400" y="1943100"/>
+            <a:ext cx="2057400" cy="1485900"/>
+          </a:xfrm>
+          <a:prstGeom prst="rect">
+            <a:avLst/>
+          </a:prstGeom>
+          <a:solidFill>
+            <a:srgbClr val="2563EB"/>
+          </a:solidFill>
+          <a:ln w="12700">
+            <a:solidFill>
+              <a:srgbClr val="FFFFFF"/>
+            </a:solidFill>
+          </a:ln>
+        </p:spPr>
+        <p:style>
+          <a:lnRef idx="1">
+            <a:schemeClr val="accent1"/>
+          </a:lnRef>
+          <a:fillRef idx="3">
+            <a:schemeClr val="accent1"/>
+          </a:fillRef>
+          <a:effectRef idx="2">
+            <a:schemeClr val="accent1"/>
+          </a:effectRef>
+          <a:fontRef idx="minor">
+            <a:schemeClr val="lt1"/>
+          </a:fontRef>
+        </p:style>
+        <p:txBody>
+          <a:bodyPr rtlCol="0" anchor="ctr"/>
+          <a:lstStyle/>
+          <a:p>
+            <a:pPr algn="ctr"/>
+          </a:p>
+        </p:txBody>
+      </p:sp>
+      <p:sp>
+        <p:nvSpPr>
+          <p:cNvPr id="9" name="TextBox 8"/>
+          <p:cNvSpPr txBox="1"/>
+          <p:nvPr/>
+        </p:nvSpPr>
+        <p:spPr>
+          <a:xfrm>
+            <a:off x="6629400" y="3429000"/>
+            <a:ext cx="2057400" cy="1485900"/>
+          </a:xfrm>
+          <a:prstGeom prst="rect">
+            <a:avLst/>
+          </a:prstGeom>
+          <a:noFill/>
+        </p:spPr>
+        <p:txBody>
+          <a:bodyPr wrap="square">
+            <a:spAutoFit/>
+          </a:bodyPr>
+          <a:lstStyle/>
+          <a:p>
+            <a:pPr>
+              <a:defRPr sz="1000" b="0">
+                <a:solidFill>
+                  <a:srgbClr val="059669"/>
+                </a:solidFill>
+                <a:latin typeface="Source Sans Pro"/>
+              </a:defRPr>
+            </a:pPr>
+            <a:r>
+              <a:t>Accent</a:t>
+            </a:r>
+          </a:p>
+          <a:p>
+            <a:pPr>
+              <a:defRPr sz="1000" b="0">
+                <a:solidFill>
+                  <a:srgbClr val="059669"/>
+                </a:solidFill>
+                <a:latin typeface="Source Sans Pro"/>
+              </a:defRPr>
+            </a:pPr>
+            <a:r>
+              <a:t>#2563EB</a:t>
+            </a:r>
+          </a:p>
+          <a:p>
+            <a:pPr>
+              <a:defRPr sz="1000" b="0">
+                <a:solidFill>
+                  <a:srgbClr val="059669"/>
+                </a:solidFill>
+                <a:latin typeface="Source Sans Pro"/>
+              </a:defRPr>
+            </a:pPr>
+            <a:r>
+              <a:t>RGB(37, 99, 235)</a:t>
+            </a:r>
+          </a:p>
+          <a:p>
+            <a:pPr>
+              <a:defRPr sz="1000" b="0">
+                <a:solidFill>
+                  <a:srgbClr val="059669"/>
+                </a:solidFill>
+                <a:latin typeface="Source Sans Pro"/>
+              </a:defRPr>
+            </a:pPr>
+            <a:r>
+              <a:t>CMYK(84, 57, 0, 7)</a:t>
+            </a:r>
+          </a:p>
+          <a:p>
+            <a:pPr>
+              <a:defRPr sz="1000" b="0">
+                <a:solidFill>
+                  <a:srgbClr val="059669"/>
+                </a:solidFill>
+                <a:latin typeface="Source Sans Pro"/>
+              </a:defRPr>
+            </a:pPr>
+            <a:r>
+              <a:t>Use Light Text</a:t>
+            </a:r>
+          </a:p>
+        </p:txBody>
+      </p:sp>
+      <p:sp>
+        <p:nvSpPr>
+          <p:cNvPr id="10" name="Rectangle 9"/>
+          <p:cNvSpPr/>
+          <p:nvPr/>
+        </p:nvSpPr>
+        <p:spPr>
+          <a:xfrm>
+            <a:off x="1143000" y="5657850"/>
+            <a:ext cx="2057400" cy="1485900"/>
+          </a:xfrm>
+          <a:prstGeom prst="rect">
+            <a:avLst/>
+          </a:prstGeom>
+          <a:solidFill>
+            <a:srgbClr val="065F46"/>
+          </a:solidFill>
+          <a:ln w="12700">
+            <a:solidFill>
+              <a:srgbClr val="FFFFFF"/>
+            </a:solidFill>
+          </a:ln>
+        </p:spPr>
+        <p:style>
+          <a:lnRef idx="1">
+            <a:schemeClr val="accent1"/>
+          </a:lnRef>
+          <a:fillRef idx="3">
+            <a:schemeClr val="accent1"/>
+          </a:fillRef>
+          <a:effectRef idx="2">
+            <a:schemeClr val="accent1"/>
+          </a:effectRef>
+          <a:fontRef idx="minor">
+            <a:schemeClr val="lt1"/>
+          </a:fontRef>
+        </p:style>
+        <p:txBody>
+          <a:bodyPr rtlCol="0" anchor="ctr"/>
+          <a:lstStyle/>
+          <a:p>
+            <a:pPr algn="ctr"/>
+          </a:p>
+        </p:txBody>
+      </p:sp>
+      <p:sp>
+        <p:nvSpPr>
+          <p:cNvPr id="11" name="TextBox 10"/>
+          <p:cNvSpPr txBox="1"/>
+          <p:nvPr/>
+        </p:nvSpPr>
+        <p:spPr>
+          <a:xfrm>
+            <a:off x="1143000" y="7143750"/>
+            <a:ext cx="2057400" cy="1485900"/>
+          </a:xfrm>
+          <a:prstGeom prst="rect">
+            <a:avLst/>
+          </a:prstGeom>
+          <a:noFill/>
+        </p:spPr>
+        <p:txBody>
+          <a:bodyPr wrap="square">
+            <a:spAutoFit/>
+          </a:bodyPr>
+          <a:lstStyle/>
+          <a:p>
+            <a:pPr>
+              <a:defRPr sz="1000" b="0">
+                <a:solidFill>
+                  <a:srgbClr val="059669"/>
+                </a:solidFill>
+                <a:latin typeface="Source Sans Pro"/>
+              </a:defRPr>
+            </a:pPr>
+            <a:r>
+              <a:t>Supporting</a:t>
+            </a:r>
+          </a:p>
+          <a:p>
+            <a:pPr>
+              <a:defRPr sz="1000" b="0">
+                <a:solidFill>
+                  <a:srgbClr val="059669"/>
+                </a:solidFill>
+                <a:latin typeface="Source Sans Pro"/>
+              </a:defRPr>
+            </a:pPr>
+            <a:r>
+              <a:t>#065F46</a:t>
+            </a:r>
+          </a:p>
+          <a:p>
+            <a:pPr>
+              <a:defRPr sz="1000" b="0">
+                <a:solidFill>
+                  <a:srgbClr val="059669"/>
+                </a:solidFill>
+                <a:latin typeface="Source Sans Pro"/>
+              </a:defRPr>
+            </a:pPr>
+            <a:r>
+              <a:t>RGB(6, 95, 70)</a:t>
+            </a:r>
+          </a:p>
+          <a:p>
+            <a:pPr>
+              <a:defRPr sz="1000" b="0">
+                <a:solidFill>
+                  <a:srgbClr val="059669"/>
+                </a:solidFill>
+                <a:latin typeface="Source Sans Pro"/>
+              </a:defRPr>
+            </a:pPr>
+            <a:r>
+              <a:t>CMYK(93, 0, 26, 62)</a:t>
+            </a:r>
+          </a:p>
+          <a:p>
+            <a:pPr>
+              <a:defRPr sz="1000" b="0">
+                <a:solidFill>
+                  <a:srgbClr val="059669"/>
+                </a:solidFill>
+                <a:latin typeface="Source Sans Pro"/>
+              </a:defRPr>
+            </a:pPr>
+            <a:r>
+              <a:t>Use Light Text</a:t>
+            </a:r>
+          </a:p>
+        </p:txBody>
+      </p:sp>
+      <p:sp>
+        <p:nvSpPr>
+          <p:cNvPr id="12" name="Rectangle 11"/>
+          <p:cNvSpPr/>
+          <p:nvPr/>
+        </p:nvSpPr>
+        <p:spPr>
+          <a:xfrm>
+            <a:off x="3886200" y="5657850"/>
+            <a:ext cx="2057400" cy="1485900"/>
+          </a:xfrm>
+          <a:prstGeom prst="rect">
+            <a:avLst/>
+          </a:prstGeom>
+          <a:solidFill>
+            <a:srgbClr val="059669"/>
+          </a:solidFill>
+          <a:ln w="12700">
+            <a:solidFill>
+              <a:srgbClr val="FFFFFF"/>
+            </a:solidFill>
+          </a:ln>
+        </p:spPr>
+        <p:style>
+          <a:lnRef idx="1">
+            <a:schemeClr val="accent1"/>
+          </a:lnRef>
+          <a:fillRef idx="3">
+            <a:schemeClr val="accent1"/>
+          </a:fillRef>
+          <a:effectRef idx="2">
+            <a:schemeClr val="accent1"/>
+          </a:effectRef>
+          <a:fontRef idx="minor">
+            <a:schemeClr val="lt1"/>
+          </a:fontRef>
+        </p:style>
+        <p:txBody>
+          <a:bodyPr rtlCol="0" anchor="ctr"/>
+          <a:lstStyle/>
+          <a:p>
+            <a:pPr algn="ctr"/>
+          </a:p>
+        </p:txBody>
+      </p:sp>
+      <p:sp>
+        <p:nvSpPr>
+          <p:cNvPr id="13" name="TextBox 12"/>
+          <p:cNvSpPr txBox="1"/>
+          <p:nvPr/>
+        </p:nvSpPr>
+        <p:spPr>
+          <a:xfrm>
+            <a:off x="3886200" y="7143750"/>
+            <a:ext cx="2057400" cy="1485900"/>
+          </a:xfrm>
+          <a:prstGeom prst="rect">
+            <a:avLst/>
+          </a:prstGeom>
+          <a:noFill/>
+        </p:spPr>
+        <p:txBody>
+          <a:bodyPr wrap="square">
+            <a:spAutoFit/>
+          </a:bodyPr>
+          <a:lstStyle/>
+          <a:p>
+            <a:pPr>
+              <a:defRPr sz="1000" b="0">
+                <a:solidFill>
+                  <a:srgbClr val="059669"/>
+                </a:solidFill>
+                <a:latin typeface="Source Sans Pro"/>
+              </a:defRPr>
+            </a:pPr>
+            <a:r>
+              <a:t>Hex_Codes</a:t>
+            </a:r>
+          </a:p>
+          <a:p>
+            <a:pPr>
+              <a:defRPr sz="1000" b="0">
+                <a:solidFill>
+                  <a:srgbClr val="059669"/>
+                </a:solidFill>
+                <a:latin typeface="Source Sans Pro"/>
+              </a:defRPr>
+            </a:pPr>
+            <a:r>
+              <a:t>#059669</a:t>
+            </a:r>
+          </a:p>
+          <a:p>
+            <a:pPr>
+              <a:defRPr sz="1000" b="0">
+                <a:solidFill>
+                  <a:srgbClr val="059669"/>
+                </a:solidFill>
+                <a:latin typeface="Source Sans Pro"/>
+              </a:defRPr>
+            </a:pPr>
+            <a:r>
+              <a:t>RGB(5, 150, 105)</a:t>
+            </a:r>
+          </a:p>
+          <a:p>
+            <a:pPr>
+              <a:defRPr sz="1000" b="0">
+                <a:solidFill>
+                  <a:srgbClr val="059669"/>
+                </a:solidFill>
+                <a:latin typeface="Source Sans Pro"/>
+              </a:defRPr>
+            </a:pPr>
+            <a:r>
+              <a:t>CMYK(96, 0, 30, 41)</a:t>
+            </a:r>
+          </a:p>
+          <a:p>
+            <a:pPr>
+              <a:defRPr sz="1000" b="0">
+                <a:solidFill>
+                  <a:srgbClr val="059669"/>
+                </a:solidFill>
+                <a:latin typeface="Source Sans Pro"/>
+              </a:defRPr>
+            </a:pPr>
+            <a:r>
+              <a:t>Use Light Text</a:t>
+            </a:r>
+          </a:p>
+        </p:txBody>
+      </p:sp>
+      <p:sp>
+        <p:nvSpPr>
+          <p:cNvPr id="14" name="TextBox 13"/>
+          <p:cNvSpPr txBox="1"/>
+          <p:nvPr/>
+        </p:nvSpPr>
+        <p:spPr>
+          <a:xfrm>
+            <a:off x="457200" y="5657850"/>
+            <a:ext cx="4114800" cy="742950"/>
           </a:xfrm>
           <a:prstGeom prst="rect">
             <a:avLst/>
@@ -3356,294 +3986,6 @@
           </a:bodyPr>
           <a:lstStyle/>
           <a:p>
-            <a:pPr>
-              <a:defRPr sz="2000" b="0">
-                <a:solidFill>
-                  <a:srgbClr val="059669"/>
-                </a:solidFill>
-                <a:latin typeface="Source Sans Pro"/>
-              </a:defRPr>
-            </a:pPr>
-            <a:r>
-              <a:t>Primary Font: Inter</a:t>
-            </a:r>
-          </a:p>
-        </p:txBody>
-      </p:sp>
-      <p:sp>
-        <p:nvSpPr>
-          <p:cNvPr id="5" name="TextBox 4"/>
-          <p:cNvSpPr txBox="1"/>
-          <p:nvPr/>
-        </p:nvSpPr>
-        <p:spPr>
-          <a:xfrm>
-            <a:off x="1143000" y="2686050"/>
-            <a:ext cx="3429000" cy="742950"/>
-          </a:xfrm>
-          <a:prstGeom prst="rect">
-            <a:avLst/>
-          </a:prstGeom>
-          <a:noFill/>
-        </p:spPr>
-        <p:txBody>
-          <a:bodyPr wrap="none">
-            <a:spAutoFit/>
-          </a:bodyPr>
-          <a:lstStyle/>
-          <a:p>
-            <a:pPr>
-              <a:defRPr sz="3200" b="1">
-                <a:solidFill>
-                  <a:srgbClr val="059669"/>
-                </a:solidFill>
-                <a:latin typeface="Inter"/>
-              </a:defRPr>
-            </a:pPr>
-            <a:r>
-              <a:t>H1 Heading</a:t>
-            </a:r>
-          </a:p>
-        </p:txBody>
-      </p:sp>
-      <p:sp>
-        <p:nvSpPr>
-          <p:cNvPr id="6" name="TextBox 5"/>
-          <p:cNvSpPr txBox="1"/>
-          <p:nvPr/>
-        </p:nvSpPr>
-        <p:spPr>
-          <a:xfrm>
-            <a:off x="1143000" y="3429000"/>
-            <a:ext cx="3429000" cy="742950"/>
-          </a:xfrm>
-          <a:prstGeom prst="rect">
-            <a:avLst/>
-          </a:prstGeom>
-          <a:noFill/>
-        </p:spPr>
-        <p:txBody>
-          <a:bodyPr wrap="none">
-            <a:spAutoFit/>
-          </a:bodyPr>
-          <a:lstStyle/>
-          <a:p>
-            <a:pPr>
-              <a:defRPr sz="2400" b="1">
-                <a:solidFill>
-                  <a:srgbClr val="059669"/>
-                </a:solidFill>
-                <a:latin typeface="Inter"/>
-              </a:defRPr>
-            </a:pPr>
-            <a:r>
-              <a:t>H2 Heading</a:t>
-            </a:r>
-          </a:p>
-        </p:txBody>
-      </p:sp>
-      <p:sp>
-        <p:nvSpPr>
-          <p:cNvPr id="7" name="TextBox 6"/>
-          <p:cNvSpPr txBox="1"/>
-          <p:nvPr/>
-        </p:nvSpPr>
-        <p:spPr>
-          <a:xfrm>
-            <a:off x="1143000" y="4171950"/>
-            <a:ext cx="3429000" cy="742950"/>
-          </a:xfrm>
-          <a:prstGeom prst="rect">
-            <a:avLst/>
-          </a:prstGeom>
-          <a:noFill/>
-        </p:spPr>
-        <p:txBody>
-          <a:bodyPr wrap="none">
-            <a:spAutoFit/>
-          </a:bodyPr>
-          <a:lstStyle/>
-          <a:p>
-            <a:pPr>
-              <a:defRPr sz="2000" b="0">
-                <a:solidFill>
-                  <a:srgbClr val="059669"/>
-                </a:solidFill>
-                <a:latin typeface="Inter"/>
-              </a:defRPr>
-            </a:pPr>
-            <a:r>
-              <a:t>H3 Heading</a:t>
-            </a:r>
-          </a:p>
-        </p:txBody>
-      </p:sp>
-      <p:sp>
-        <p:nvSpPr>
-          <p:cNvPr id="8" name="TextBox 7"/>
-          <p:cNvSpPr txBox="1"/>
-          <p:nvPr/>
-        </p:nvSpPr>
-        <p:spPr>
-          <a:xfrm>
-            <a:off x="5257800" y="1943100"/>
-            <a:ext cx="3429000" cy="742950"/>
-          </a:xfrm>
-          <a:prstGeom prst="rect">
-            <a:avLst/>
-          </a:prstGeom>
-          <a:noFill/>
-        </p:spPr>
-        <p:txBody>
-          <a:bodyPr wrap="none">
-            <a:spAutoFit/>
-          </a:bodyPr>
-          <a:lstStyle/>
-          <a:p>
-            <a:pPr>
-              <a:defRPr sz="2000" b="0">
-                <a:solidFill>
-                  <a:srgbClr val="059669"/>
-                </a:solidFill>
-                <a:latin typeface="Source Sans Pro"/>
-              </a:defRPr>
-            </a:pPr>
-            <a:r>
-              <a:t>Secondary Font: Source Sans Pro</a:t>
-            </a:r>
-          </a:p>
-        </p:txBody>
-      </p:sp>
-      <p:sp>
-        <p:nvSpPr>
-          <p:cNvPr id="9" name="TextBox 8"/>
-          <p:cNvSpPr txBox="1"/>
-          <p:nvPr/>
-        </p:nvSpPr>
-        <p:spPr>
-          <a:xfrm>
-            <a:off x="5257800" y="2686050"/>
-            <a:ext cx="3429000" cy="742950"/>
-          </a:xfrm>
-          <a:prstGeom prst="rect">
-            <a:avLst/>
-          </a:prstGeom>
-          <a:noFill/>
-        </p:spPr>
-        <p:txBody>
-          <a:bodyPr wrap="none">
-            <a:spAutoFit/>
-          </a:bodyPr>
-          <a:lstStyle/>
-          <a:p>
-            <a:pPr>
-              <a:defRPr sz="1600" b="0">
-                <a:solidFill>
-                  <a:srgbClr val="059669"/>
-                </a:solidFill>
-                <a:latin typeface="Source Sans Pro"/>
-              </a:defRPr>
-            </a:pPr>
-            <a:r>
-              <a:t>Body Text</a:t>
-            </a:r>
-          </a:p>
-        </p:txBody>
-      </p:sp>
-      <p:sp>
-        <p:nvSpPr>
-          <p:cNvPr id="10" name="TextBox 9"/>
-          <p:cNvSpPr txBox="1"/>
-          <p:nvPr/>
-        </p:nvSpPr>
-        <p:spPr>
-          <a:xfrm>
-            <a:off x="5257800" y="3429000"/>
-            <a:ext cx="3429000" cy="742950"/>
-          </a:xfrm>
-          <a:prstGeom prst="rect">
-            <a:avLst/>
-          </a:prstGeom>
-          <a:noFill/>
-        </p:spPr>
-        <p:txBody>
-          <a:bodyPr wrap="none">
-            <a:spAutoFit/>
-          </a:bodyPr>
-          <a:lstStyle/>
-          <a:p>
-            <a:pPr>
-              <a:defRPr sz="1600" b="1">
-                <a:solidFill>
-                  <a:srgbClr val="059669"/>
-                </a:solidFill>
-                <a:latin typeface="Source Sans Pro"/>
-              </a:defRPr>
-            </a:pPr>
-            <a:r>
-              <a:t>Body Bold</a:t>
-            </a:r>
-          </a:p>
-        </p:txBody>
-      </p:sp>
-      <p:sp>
-        <p:nvSpPr>
-          <p:cNvPr id="11" name="TextBox 10"/>
-          <p:cNvSpPr txBox="1"/>
-          <p:nvPr/>
-        </p:nvSpPr>
-        <p:spPr>
-          <a:xfrm>
-            <a:off x="5257800" y="4171950"/>
-            <a:ext cx="3429000" cy="742950"/>
-          </a:xfrm>
-          <a:prstGeom prst="rect">
-            <a:avLst/>
-          </a:prstGeom>
-          <a:noFill/>
-        </p:spPr>
-        <p:txBody>
-          <a:bodyPr wrap="none">
-            <a:spAutoFit/>
-          </a:bodyPr>
-          <a:lstStyle/>
-          <a:p>
-            <a:pPr>
-              <a:defRPr sz="1200" b="0">
-                <a:solidFill>
-                  <a:srgbClr val="059669"/>
-                </a:solidFill>
-                <a:latin typeface="Source Sans Pro"/>
-              </a:defRPr>
-            </a:pPr>
-            <a:r>
-              <a:t>Caption Text</a:t>
-            </a:r>
-          </a:p>
-        </p:txBody>
-      </p:sp>
-      <p:sp>
-        <p:nvSpPr>
-          <p:cNvPr id="12" name="TextBox 11"/>
-          <p:cNvSpPr txBox="1"/>
-          <p:nvPr/>
-        </p:nvSpPr>
-        <p:spPr>
-          <a:xfrm>
-            <a:off x="457200" y="5657850"/>
-            <a:ext cx="4114800" cy="742950"/>
-          </a:xfrm>
-          <a:prstGeom prst="rect">
-            <a:avLst/>
-          </a:prstGeom>
-          <a:noFill/>
-        </p:spPr>
-        <p:txBody>
-          <a:bodyPr wrap="none">
-            <a:spAutoFit/>
-          </a:bodyPr>
-          <a:lstStyle/>
-          <a:p>
             <a:pPr algn="l">
               <a:defRPr sz="1000" b="0">
                 <a:solidFill>
@@ -3660,7 +4002,7 @@
       </p:sp>
       <p:sp>
         <p:nvSpPr>
-          <p:cNvPr id="13" name="TextBox 12"/>
+          <p:cNvPr id="15" name="TextBox 14"/>
           <p:cNvSpPr txBox="1"/>
           <p:nvPr/>
         </p:nvSpPr>
@@ -3786,6 +4128,463 @@
               </a:defRPr>
             </a:pPr>
             <a:r>
+              <a:t>Typography</a:t>
+            </a:r>
+          </a:p>
+        </p:txBody>
+      </p:sp>
+      <p:sp>
+        <p:nvSpPr>
+          <p:cNvPr id="4" name="TextBox 3"/>
+          <p:cNvSpPr txBox="1"/>
+          <p:nvPr/>
+        </p:nvSpPr>
+        <p:spPr>
+          <a:xfrm>
+            <a:off x="1143000" y="1943100"/>
+            <a:ext cx="3429000" cy="742950"/>
+          </a:xfrm>
+          <a:prstGeom prst="rect">
+            <a:avLst/>
+          </a:prstGeom>
+          <a:noFill/>
+        </p:spPr>
+        <p:txBody>
+          <a:bodyPr wrap="none">
+            <a:spAutoFit/>
+          </a:bodyPr>
+          <a:lstStyle/>
+          <a:p>
+            <a:pPr>
+              <a:defRPr sz="2000" b="0">
+                <a:solidFill>
+                  <a:srgbClr val="059669"/>
+                </a:solidFill>
+                <a:latin typeface="Source Sans Pro"/>
+              </a:defRPr>
+            </a:pPr>
+            <a:r>
+              <a:t>Primary Font: Inter</a:t>
+            </a:r>
+          </a:p>
+        </p:txBody>
+      </p:sp>
+      <p:sp>
+        <p:nvSpPr>
+          <p:cNvPr id="5" name="TextBox 4"/>
+          <p:cNvSpPr txBox="1"/>
+          <p:nvPr/>
+        </p:nvSpPr>
+        <p:spPr>
+          <a:xfrm>
+            <a:off x="1143000" y="2686050"/>
+            <a:ext cx="3429000" cy="742950"/>
+          </a:xfrm>
+          <a:prstGeom prst="rect">
+            <a:avLst/>
+          </a:prstGeom>
+          <a:noFill/>
+        </p:spPr>
+        <p:txBody>
+          <a:bodyPr wrap="none">
+            <a:spAutoFit/>
+          </a:bodyPr>
+          <a:lstStyle/>
+          <a:p>
+            <a:pPr>
+              <a:defRPr sz="3200" b="1">
+                <a:solidFill>
+                  <a:srgbClr val="059669"/>
+                </a:solidFill>
+                <a:latin typeface="Inter"/>
+              </a:defRPr>
+            </a:pPr>
+            <a:r>
+              <a:t>H1 Heading</a:t>
+            </a:r>
+          </a:p>
+        </p:txBody>
+      </p:sp>
+      <p:sp>
+        <p:nvSpPr>
+          <p:cNvPr id="6" name="TextBox 5"/>
+          <p:cNvSpPr txBox="1"/>
+          <p:nvPr/>
+        </p:nvSpPr>
+        <p:spPr>
+          <a:xfrm>
+            <a:off x="1143000" y="3429000"/>
+            <a:ext cx="3429000" cy="742950"/>
+          </a:xfrm>
+          <a:prstGeom prst="rect">
+            <a:avLst/>
+          </a:prstGeom>
+          <a:noFill/>
+        </p:spPr>
+        <p:txBody>
+          <a:bodyPr wrap="none">
+            <a:spAutoFit/>
+          </a:bodyPr>
+          <a:lstStyle/>
+          <a:p>
+            <a:pPr>
+              <a:defRPr sz="2400" b="1">
+                <a:solidFill>
+                  <a:srgbClr val="059669"/>
+                </a:solidFill>
+                <a:latin typeface="Inter"/>
+              </a:defRPr>
+            </a:pPr>
+            <a:r>
+              <a:t>H2 Heading</a:t>
+            </a:r>
+          </a:p>
+        </p:txBody>
+      </p:sp>
+      <p:sp>
+        <p:nvSpPr>
+          <p:cNvPr id="7" name="TextBox 6"/>
+          <p:cNvSpPr txBox="1"/>
+          <p:nvPr/>
+        </p:nvSpPr>
+        <p:spPr>
+          <a:xfrm>
+            <a:off x="1143000" y="4171950"/>
+            <a:ext cx="3429000" cy="742950"/>
+          </a:xfrm>
+          <a:prstGeom prst="rect">
+            <a:avLst/>
+          </a:prstGeom>
+          <a:noFill/>
+        </p:spPr>
+        <p:txBody>
+          <a:bodyPr wrap="none">
+            <a:spAutoFit/>
+          </a:bodyPr>
+          <a:lstStyle/>
+          <a:p>
+            <a:pPr>
+              <a:defRPr sz="2000" b="0">
+                <a:solidFill>
+                  <a:srgbClr val="059669"/>
+                </a:solidFill>
+                <a:latin typeface="Inter"/>
+              </a:defRPr>
+            </a:pPr>
+            <a:r>
+              <a:t>H3 Heading</a:t>
+            </a:r>
+          </a:p>
+        </p:txBody>
+      </p:sp>
+      <p:sp>
+        <p:nvSpPr>
+          <p:cNvPr id="8" name="TextBox 7"/>
+          <p:cNvSpPr txBox="1"/>
+          <p:nvPr/>
+        </p:nvSpPr>
+        <p:spPr>
+          <a:xfrm>
+            <a:off x="5257800" y="1943100"/>
+            <a:ext cx="3429000" cy="742950"/>
+          </a:xfrm>
+          <a:prstGeom prst="rect">
+            <a:avLst/>
+          </a:prstGeom>
+          <a:noFill/>
+        </p:spPr>
+        <p:txBody>
+          <a:bodyPr wrap="none">
+            <a:spAutoFit/>
+          </a:bodyPr>
+          <a:lstStyle/>
+          <a:p>
+            <a:pPr>
+              <a:defRPr sz="2000" b="0">
+                <a:solidFill>
+                  <a:srgbClr val="059669"/>
+                </a:solidFill>
+                <a:latin typeface="Source Sans Pro"/>
+              </a:defRPr>
+            </a:pPr>
+            <a:r>
+              <a:t>Secondary Font: Source Sans Pro</a:t>
+            </a:r>
+          </a:p>
+        </p:txBody>
+      </p:sp>
+      <p:sp>
+        <p:nvSpPr>
+          <p:cNvPr id="9" name="TextBox 8"/>
+          <p:cNvSpPr txBox="1"/>
+          <p:nvPr/>
+        </p:nvSpPr>
+        <p:spPr>
+          <a:xfrm>
+            <a:off x="5257800" y="2686050"/>
+            <a:ext cx="3429000" cy="742950"/>
+          </a:xfrm>
+          <a:prstGeom prst="rect">
+            <a:avLst/>
+          </a:prstGeom>
+          <a:noFill/>
+        </p:spPr>
+        <p:txBody>
+          <a:bodyPr wrap="none">
+            <a:spAutoFit/>
+          </a:bodyPr>
+          <a:lstStyle/>
+          <a:p>
+            <a:pPr>
+              <a:defRPr sz="1600" b="0">
+                <a:solidFill>
+                  <a:srgbClr val="059669"/>
+                </a:solidFill>
+                <a:latin typeface="Source Sans Pro"/>
+              </a:defRPr>
+            </a:pPr>
+            <a:r>
+              <a:t>Body Text</a:t>
+            </a:r>
+          </a:p>
+        </p:txBody>
+      </p:sp>
+      <p:sp>
+        <p:nvSpPr>
+          <p:cNvPr id="10" name="TextBox 9"/>
+          <p:cNvSpPr txBox="1"/>
+          <p:nvPr/>
+        </p:nvSpPr>
+        <p:spPr>
+          <a:xfrm>
+            <a:off x="5257800" y="3429000"/>
+            <a:ext cx="3429000" cy="742950"/>
+          </a:xfrm>
+          <a:prstGeom prst="rect">
+            <a:avLst/>
+          </a:prstGeom>
+          <a:noFill/>
+        </p:spPr>
+        <p:txBody>
+          <a:bodyPr wrap="none">
+            <a:spAutoFit/>
+          </a:bodyPr>
+          <a:lstStyle/>
+          <a:p>
+            <a:pPr>
+              <a:defRPr sz="1600" b="1">
+                <a:solidFill>
+                  <a:srgbClr val="059669"/>
+                </a:solidFill>
+                <a:latin typeface="Source Sans Pro"/>
+              </a:defRPr>
+            </a:pPr>
+            <a:r>
+              <a:t>Body Bold</a:t>
+            </a:r>
+          </a:p>
+        </p:txBody>
+      </p:sp>
+      <p:sp>
+        <p:nvSpPr>
+          <p:cNvPr id="11" name="TextBox 10"/>
+          <p:cNvSpPr txBox="1"/>
+          <p:nvPr/>
+        </p:nvSpPr>
+        <p:spPr>
+          <a:xfrm>
+            <a:off x="5257800" y="4171950"/>
+            <a:ext cx="3429000" cy="742950"/>
+          </a:xfrm>
+          <a:prstGeom prst="rect">
+            <a:avLst/>
+          </a:prstGeom>
+          <a:noFill/>
+        </p:spPr>
+        <p:txBody>
+          <a:bodyPr wrap="none">
+            <a:spAutoFit/>
+          </a:bodyPr>
+          <a:lstStyle/>
+          <a:p>
+            <a:pPr>
+              <a:defRPr sz="1200" b="0">
+                <a:solidFill>
+                  <a:srgbClr val="059669"/>
+                </a:solidFill>
+                <a:latin typeface="Source Sans Pro"/>
+              </a:defRPr>
+            </a:pPr>
+            <a:r>
+              <a:t>Caption Text</a:t>
+            </a:r>
+          </a:p>
+        </p:txBody>
+      </p:sp>
+      <p:sp>
+        <p:nvSpPr>
+          <p:cNvPr id="12" name="TextBox 11"/>
+          <p:cNvSpPr txBox="1"/>
+          <p:nvPr/>
+        </p:nvSpPr>
+        <p:spPr>
+          <a:xfrm>
+            <a:off x="457200" y="5657850"/>
+            <a:ext cx="4114800" cy="742950"/>
+          </a:xfrm>
+          <a:prstGeom prst="rect">
+            <a:avLst/>
+          </a:prstGeom>
+          <a:noFill/>
+        </p:spPr>
+        <p:txBody>
+          <a:bodyPr wrap="none">
+            <a:spAutoFit/>
+          </a:bodyPr>
+          <a:lstStyle/>
+          <a:p>
+            <a:pPr algn="l">
+              <a:defRPr sz="1000" b="0">
+                <a:solidFill>
+                  <a:srgbClr val="059669"/>
+                </a:solidFill>
+                <a:latin typeface="Source Sans Pro"/>
+              </a:defRPr>
+            </a:pPr>
+            <a:r>
+              <a:t>Zeta</a:t>
+            </a:r>
+          </a:p>
+        </p:txBody>
+      </p:sp>
+      <p:sp>
+        <p:nvSpPr>
+          <p:cNvPr id="13" name="TextBox 12"/>
+          <p:cNvSpPr txBox="1"/>
+          <p:nvPr/>
+        </p:nvSpPr>
+        <p:spPr>
+          <a:xfrm>
+            <a:off x="4572000" y="5657850"/>
+            <a:ext cx="4114800" cy="742950"/>
+          </a:xfrm>
+          <a:prstGeom prst="rect">
+            <a:avLst/>
+          </a:prstGeom>
+          <a:noFill/>
+        </p:spPr>
+        <p:txBody>
+          <a:bodyPr wrap="none">
+            <a:spAutoFit/>
+          </a:bodyPr>
+          <a:lstStyle/>
+          <a:p>
+            <a:pPr algn="r">
+              <a:defRPr sz="1000" b="0">
+                <a:solidFill>
+                  <a:srgbClr val="059669"/>
+                </a:solidFill>
+                <a:latin typeface="Source Sans Pro"/>
+              </a:defRPr>
+            </a:pPr>
+            <a:r>
+              <a:t>11</a:t>
+            </a:r>
+          </a:p>
+        </p:txBody>
+      </p:sp>
+    </p:spTree>
+  </p:cSld>
+  <p:clrMapOvr>
+    <a:masterClrMapping/>
+  </p:clrMapOvr>
+</p:sld>
+</file>
+
+<file path=ppt/slides/slide12.xml><?xml version="1.0" encoding="utf-8"?>
+<p:sld xmlns:a="http://schemas.openxmlformats.org/drawingml/2006/main" xmlns:p="http://schemas.openxmlformats.org/presentationml/2006/main" xmlns:r="http://schemas.openxmlformats.org/officeDocument/2006/relationships">
+  <p:cSld>
+    <p:spTree>
+      <p:nvGrpSpPr>
+        <p:cNvPr id="1" name=""/>
+        <p:cNvGrpSpPr/>
+        <p:nvPr/>
+      </p:nvGrpSpPr>
+      <p:sp>
+        <p:nvSpPr>
+          <p:cNvPr id="2" name="Rectangle 1"/>
+          <p:cNvSpPr/>
+          <p:nvPr/>
+        </p:nvSpPr>
+        <p:spPr>
+          <a:xfrm>
+            <a:off x="0" y="0"/>
+            <a:ext cx="9144000" cy="6858000"/>
+          </a:xfrm>
+          <a:prstGeom prst="rect">
+            <a:avLst/>
+          </a:prstGeom>
+          <a:solidFill>
+            <a:srgbClr val="1A1A1A"/>
+          </a:solidFill>
+          <a:ln>
+            <a:noFill/>
+          </a:ln>
+        </p:spPr>
+        <p:style>
+          <a:lnRef idx="1">
+            <a:schemeClr val="accent1"/>
+          </a:lnRef>
+          <a:fillRef idx="3">
+            <a:schemeClr val="accent1"/>
+          </a:fillRef>
+          <a:effectRef idx="2">
+            <a:schemeClr val="accent1"/>
+          </a:effectRef>
+          <a:fontRef idx="minor">
+            <a:schemeClr val="lt1"/>
+          </a:fontRef>
+        </p:style>
+        <p:txBody>
+          <a:bodyPr rtlCol="0" anchor="ctr"/>
+          <a:lstStyle/>
+          <a:p>
+            <a:pPr algn="ctr"/>
+          </a:p>
+        </p:txBody>
+      </p:sp>
+      <p:grpSpPr/>
+      <p:sp>
+        <p:nvSpPr>
+          <p:cNvPr id="3" name="TextBox 2"/>
+          <p:cNvSpPr txBox="1"/>
+          <p:nvPr/>
+        </p:nvSpPr>
+        <p:spPr>
+          <a:xfrm>
+            <a:off x="1143000" y="457200"/>
+            <a:ext cx="6858000" cy="742950"/>
+          </a:xfrm>
+          <a:prstGeom prst="rect">
+            <a:avLst/>
+          </a:prstGeom>
+          <a:noFill/>
+        </p:spPr>
+        <p:txBody>
+          <a:bodyPr wrap="none">
+            <a:spAutoFit/>
+          </a:bodyPr>
+          <a:lstStyle/>
+          <a:p>
+            <a:pPr>
+              <a:defRPr sz="3200" b="1">
+                <a:solidFill>
+                  <a:srgbClr val="059669"/>
+                </a:solidFill>
+                <a:latin typeface="Inter"/>
+              </a:defRPr>
+            </a:pPr>
+            <a:r>
               <a:t>Visual &amp; Photography Guidelines</a:t>
             </a:r>
           </a:p>
@@ -3835,7 +4634,7 @@
               </a:defRPr>
             </a:pPr>
             <a:r>
-              <a:t>• Visual style for Zeta in Banking Technology</a:t>
+              <a:t>• Visual style for Zeta in Banking Technology / Fintech: Elegant aesthetic</a:t>
             </a:r>
           </a:p>
           <a:p>
@@ -3848,7 +4647,7 @@
               </a:defRPr>
             </a:pPr>
             <a:r>
-              <a:t>• Fintech: Elegrant aesthetic</a:t>
+              <a:t>• values: Reliability</a:t>
             </a:r>
           </a:p>
           <a:p>
@@ -3861,7 +4660,7 @@
               </a:defRPr>
             </a:pPr>
             <a:r>
-              <a:t>• values: Reliability</a:t>
+              <a:t>• Innovation</a:t>
             </a:r>
           </a:p>
           <a:p>
@@ -3874,7 +4673,7 @@
               </a:defRPr>
             </a:pPr>
             <a:r>
-              <a:t>• Innovation</a:t>
+              <a:t>• Precision</a:t>
             </a:r>
           </a:p>
           <a:p>
@@ -3887,7 +4686,7 @@
               </a:defRPr>
             </a:pPr>
             <a:r>
-              <a:t>• Precision</a:t>
+              <a:t>• Scalability</a:t>
             </a:r>
           </a:p>
         </p:txBody>
@@ -3936,7 +4735,7 @@
               </a:defRPr>
             </a:pPr>
             <a:r>
-              <a:t>• Photography style for Zeta: Elegrant and Banking Technology</a:t>
+              <a:t>• Photography style for Zeta: Elegant and Banking Technology / Fintech feel. Show diversity</a:t>
             </a:r>
           </a:p>
           <a:p>
@@ -3949,7 +4748,7 @@
               </a:defRPr>
             </a:pPr>
             <a:r>
-              <a:t>• Fintech feel. Show diversity</a:t>
+              <a:t>• authenticity</a:t>
             </a:r>
           </a:p>
           <a:p>
@@ -3962,7 +4761,7 @@
               </a:defRPr>
             </a:pPr>
             <a:r>
-              <a:t>• authenticity</a:t>
+              <a:t>• and lighting that supports brand values: Reliability</a:t>
             </a:r>
           </a:p>
           <a:p>
@@ -3975,7 +4774,7 @@
               </a:defRPr>
             </a:pPr>
             <a:r>
-              <a:t>• and lighting that supports brand values: Reliability</a:t>
+              <a:t>• Innovation</a:t>
             </a:r>
           </a:p>
           <a:p>
@@ -3988,7 +4787,7 @@
               </a:defRPr>
             </a:pPr>
             <a:r>
-              <a:t>• Innovation</a:t>
+              <a:t>• Precision</a:t>
             </a:r>
           </a:p>
         </p:txBody>
@@ -4303,7 +5102,7 @@
               </a:defRPr>
             </a:pPr>
             <a:r>
-              <a:t>11</a:t>
+              <a:t>12</a:t>
             </a:r>
           </a:p>
         </p:txBody>
@@ -5860,7 +6659,7 @@
               </a:defRPr>
             </a:pPr>
             <a:r>
-              <a:t>Welcome to Zeta's brand identity system presentation, where we unveil the blueprint for our distinctive Banking Technology , Fintech brand. This system ensures an international, engaging, consistent, recognizable, and proprietary brand presentation, reflecting our core values of reliability, innovation, and customer empowerment. Join us as we showcase how our innovative approach and fundamental principles come to life in the dynamic world of Banks, Fintech companies, and Financial institutions.</a:t>
+              <a:t>Welcome to Zeta's brand identity system presentation. At Zeta, we embody innovation and precision in the Banking Technology / Fintech industry. Our brand promise of empowering financial institutions in markets like India is brought to life through our distinctive solutions. This system ensures an internationally engaging, consistent, and recognizable brand presentation, reflective of our core values and creative approach.</a:t>
             </a:r>
           </a:p>
         </p:txBody>
@@ -5996,7 +6795,7 @@
               </a:defRPr>
             </a:pPr>
             <a:r>
-              <a:t>Zeta envisions a future where Banking Technology and Fintech solutions redefine the landscape of financial services, empowering Banks, Fintech companies, Financial institutions, NBFCs, and Corporates in markets like India to achieve unprecedented levels of innovation and customer-centricity. Our ultimate goal is to drive a digital transformation that revolutionizes the way financial entities operate, creating a more inclusive and efficient financial ecosystem for all.</a:t>
+              <a:t>At Zeta, our vision is to revolutionize the Banking Technology / Fintech landscape by pioneering innovative solutions that empower Banks, Fintech companies, Financial institutions, NBFCs, and Corporates in launching embedded banking, especially in dynamic markets like India. We aspire to be the catalyst for digital transformation, driving unprecedented growth and success for our partners.</a:t>
             </a:r>
           </a:p>
         </p:txBody>
@@ -6132,7 +6931,7 @@
               </a:defRPr>
             </a:pPr>
             <a:r>
-              <a:t>At Zeta, we are dedicated to pioneering cutting-edge Banking Technology and Fintech solutions tailored specifically for Banks, Fintech companies, Financial institutions, NBFCs, and Corporates launching embedded banking in markets like India. Our mission is to provide user-centric design approaches that enhance operational efficiency, customer engagement, and industry competitiveness, ultimately revolutionizing the financial services sector through innovation and technology.</a:t>
+              <a:t>Zeta is dedicated to delivering cutting-edge Banking Technology / Fintech solutions tailored to the unique needs of our stakeholders. By combining our user-centric design approach with relentless innovation, we aim to streamline operations, enhance customer experiences, and drive sustainable growth for our clients in the financial industry.</a:t>
             </a:r>
           </a:p>
         </p:txBody>
@@ -6268,7 +7067,7 @@
               </a:defRPr>
             </a:pPr>
             <a:r>
-              <a:t>Guided by the core principles of Reliability, Innovation, Precision, Scalability, Partnership, Compliance, Transparency, Speed, Business-Centric, and Customer Empowerment, Zeta is committed to upholding the highest standards of excellence in the Banking Technology and Fintech industry. We believe that through strategic partnerships, relentless innovation, and a customer-first approach, we can drive sustainable growth, foster trust, and empower financial institutions to thrive in the ever-evolving digital economy of today and tomorrow.</a:t>
+              <a:t>At Zeta, we embody a culture built on the pillars of Reliability, Innovation, Precision, Scalability, Partnership, Compliance, Transparency, Speed, Business-Centric focus, and Customer Empowerment. These values guide us in every endeavor, ensuring that we exceed expectations, foster meaningful collaborations, and empower our partners to thrive in an ever-evolving financial ecosystem.</a:t>
             </a:r>
           </a:p>
         </p:txBody>
@@ -6404,36 +7203,7 @@
               </a:defRPr>
             </a:pPr>
             <a:r>
-              <a:t>In the bustling world of Banking Technology and Fintech, one name stands out among the rest - Zeta. Born out of a vision to revolutionize the way banks, fintech companies, financial institutions, NBFCs, and corporates approach embedded banking, Zeta is not just a solution provider; it is a partner in empowerment and innovation. At the heart of Zeta's ethos lies a commitment to reliability, precision, scalability, and compliance. We understand the challenges faced by our clients in navigating the complex landscape of modern finance, and we are here to provide them with cutting-edge solutions that not only meet their needs but exceed their expectations.</a:t>
-            </a:r>
-          </a:p>
-          <a:p>
-            <a:pPr algn="l">
-              <a:spcAft>
-                <a:spcPts val="800"/>
-              </a:spcAft>
-              <a:defRPr sz="2000" b="0">
-                <a:solidFill>
-                  <a:srgbClr val="FFFFFF"/>
-                </a:solidFill>
-                <a:latin typeface="Source Sans Pro"/>
-              </a:defRPr>
-            </a:pPr>
-          </a:p>
-          <a:p>
-            <a:pPr algn="l">
-              <a:spcAft>
-                <a:spcPts val="800"/>
-              </a:spcAft>
-              <a:defRPr sz="2000" b="0">
-                <a:solidFill>
-                  <a:srgbClr val="FFFFFF"/>
-                </a:solidFill>
-                <a:latin typeface="Source Sans Pro"/>
-              </a:defRPr>
-            </a:pPr>
-            <a:r>
-              <a:t>Our brand promise is simple yet powerful - to empower banks, fintech companies, financial institutions, NBFCs, and corporates launching embedded banking in markets like India through our innovative Banking Technology and Fintech solutions. We believe in the power of partnership and transparency, working hand in hand with our clients to co-create solutions that drive their business forward. What sets Zeta apart is our unique value proposition - a distinctive approach to Banking Technology and Fintech solutions that is tailored to the specific needs of our clients in the Indian market. We understand the nuances of operating...</a:t>
+              <a:t>In the fast-evolving landscape of Banking Technology and Fintech, one name stands out as a beacon of innovation and reliability – Zeta. At Zeta, we are more than just a technology company; we are a partner in progress for Banks, Fintech companies, Financial institutions, NBFCs, and Corporates looking to revolutionize the way they do banking. Our core values of reliability, innovation, precision, scalability, partnership, compliance, transparency, speed, and customer empowerment guide everything we do. Picture this: a world where banking is seamless, efficient, and tailored to meet the unique needs of each customer.</a:t>
             </a:r>
           </a:p>
         </p:txBody>
@@ -6504,7 +7274,7 @@
               </a:defRPr>
             </a:pPr>
             <a:r>
-              <a:t>BRAND STORY</a:t>
+              <a:t>BRAND STORY (1/2)</a:t>
             </a:r>
           </a:p>
         </p:txBody>
@@ -6520,66 +7290,105 @@
 <file path=ppt/slides/slide8.xml><?xml version="1.0" encoding="utf-8"?>
 <p:sld xmlns:a="http://schemas.openxmlformats.org/drawingml/2006/main" xmlns:p="http://schemas.openxmlformats.org/presentationml/2006/main" xmlns:r="http://schemas.openxmlformats.org/officeDocument/2006/relationships">
   <p:cSld>
+    <p:bg>
+      <p:bgPr>
+        <a:solidFill>
+          <a:srgbClr val="000000"/>
+        </a:solidFill>
+        <a:effectLst/>
+      </p:bgPr>
+    </p:bg>
     <p:spTree>
       <p:nvGrpSpPr>
         <p:cNvPr id="1" name=""/>
         <p:cNvGrpSpPr/>
         <p:nvPr/>
       </p:nvGrpSpPr>
-      <p:sp>
-        <p:nvSpPr>
-          <p:cNvPr id="2" name="Rectangle 1"/>
-          <p:cNvSpPr/>
-          <p:nvPr/>
-        </p:nvSpPr>
-        <p:spPr>
-          <a:xfrm>
-            <a:off x="0" y="0"/>
-            <a:ext cx="9144000" cy="6858000"/>
-          </a:xfrm>
-          <a:prstGeom prst="rect">
-            <a:avLst/>
-          </a:prstGeom>
-          <a:solidFill>
-            <a:srgbClr val="1A1A1A"/>
-          </a:solidFill>
-          <a:ln>
-            <a:noFill/>
+      <p:grpSpPr/>
+      <p:sp>
+        <p:nvSpPr>
+          <p:cNvPr id="2" name="TextBox 1"/>
+          <p:cNvSpPr txBox="1"/>
+          <p:nvPr/>
+        </p:nvSpPr>
+        <p:spPr>
+          <a:xfrm>
+            <a:off x="800100" y="1051560"/>
+            <a:ext cx="6858000" cy="2971800"/>
+          </a:xfrm>
+          <a:prstGeom prst="rect">
+            <a:avLst/>
+          </a:prstGeom>
+          <a:noFill/>
+        </p:spPr>
+        <p:txBody>
+          <a:bodyPr wrap="square" lIns="0" rIns="0" tIns="0" bIns="0">
+            <a:spAutoFit/>
+          </a:bodyPr>
+          <a:lstStyle/>
+          <a:p>
+            <a:pPr algn="l">
+              <a:spcAft>
+                <a:spcPts val="800"/>
+              </a:spcAft>
+              <a:defRPr sz="2000" b="0">
+                <a:solidFill>
+                  <a:srgbClr val="FFFFFF"/>
+                </a:solidFill>
+                <a:latin typeface="Source Sans Pro"/>
+              </a:defRPr>
+            </a:pPr>
+            <a:r>
+              <a:t>This is the world that Zeta is creating through our cutting-edge Banking Technology and Fintech solutions. We believe in empowering our clients to not just keep up with the times but to stay ahead of the curve. What sets us apart is our unwavering commitment to providing distinctive solutions that are business-centric and scalable, particularly in markets like India. We understand the challenges our clients face in this dynamic industry, and we are here to provide them with the tools they need to succeed. Our brand promise is simple yet powerful – to empower Banks, Fintech companies, Financial institutions, NBFCs, and Corporates launching embedded banking through innovative...</a:t>
+            </a:r>
+          </a:p>
+        </p:txBody>
+      </p:sp>
+      <p:cxnSp>
+        <p:nvCxnSpPr>
+          <p:cNvPr id="3" name="Connector 2"/>
+          <p:cNvCxnSpPr/>
+          <p:nvPr/>
+        </p:nvCxnSpPr>
+        <p:spPr>
+          <a:xfrm>
+            <a:off x="457200" y="4914900.0"/>
+            <a:ext cx="8229600" cy="0.0"/>
+          </a:xfrm>
+          <a:prstGeom prst="line">
+            <a:avLst/>
+          </a:prstGeom>
+          <a:ln w="25400">
+            <a:solidFill>
+              <a:srgbClr val="059669"/>
+            </a:solidFill>
           </a:ln>
         </p:spPr>
         <p:style>
-          <a:lnRef idx="1">
+          <a:lnRef idx="2">
             <a:schemeClr val="accent1"/>
           </a:lnRef>
-          <a:fillRef idx="3">
+          <a:fillRef idx="0">
             <a:schemeClr val="accent1"/>
           </a:fillRef>
-          <a:effectRef idx="2">
+          <a:effectRef idx="1">
             <a:schemeClr val="accent1"/>
           </a:effectRef>
           <a:fontRef idx="minor">
-            <a:schemeClr val="lt1"/>
+            <a:schemeClr val="tx1"/>
           </a:fontRef>
         </p:style>
-        <p:txBody>
-          <a:bodyPr rtlCol="0" anchor="ctr"/>
-          <a:lstStyle/>
-          <a:p>
-            <a:pPr algn="ctr"/>
-          </a:p>
-        </p:txBody>
-      </p:sp>
-      <p:grpSpPr/>
-      <p:sp>
-        <p:nvSpPr>
-          <p:cNvPr id="3" name="TextBox 2"/>
+      </p:cxnSp>
+      <p:sp>
+        <p:nvSpPr>
+          <p:cNvPr id="4" name="TextBox 3"/>
           <p:cNvSpPr txBox="1"/>
           <p:nvPr/>
         </p:nvSpPr>
         <p:spPr>
           <a:xfrm>
-            <a:off x="1143000" y="457200"/>
-            <a:ext cx="6858000" cy="742950"/>
+            <a:off x="800100" y="5189220"/>
+            <a:ext cx="5486400" cy="731520"/>
           </a:xfrm>
           <a:prstGeom prst="rect">
             <a:avLst/>
@@ -6592,8 +7401,8 @@
           </a:bodyPr>
           <a:lstStyle/>
           <a:p>
-            <a:pPr>
-              <a:defRPr sz="3200" b="1">
+            <a:pPr algn="l">
+              <a:defRPr sz="2800" b="1">
                 <a:solidFill>
                   <a:srgbClr val="059669"/>
                 </a:solidFill>
@@ -6601,424 +7410,7 @@
               </a:defRPr>
             </a:pPr>
             <a:r>
-              <a:t>Logo Variations (3 designs)</a:t>
-            </a:r>
-          </a:p>
-        </p:txBody>
-      </p:sp>
-      <p:sp>
-        <p:nvSpPr>
-          <p:cNvPr id="4" name="Rectangle 3"/>
-          <p:cNvSpPr/>
-          <p:nvPr/>
-        </p:nvSpPr>
-        <p:spPr>
-          <a:xfrm>
-            <a:off x="1051560" y="1851660"/>
-            <a:ext cx="1554480" cy="1668780"/>
-          </a:xfrm>
-          <a:prstGeom prst="rect">
-            <a:avLst/>
-          </a:prstGeom>
-          <a:solidFill>
-            <a:srgbClr val="FFFFFF"/>
-          </a:solidFill>
-          <a:ln>
-            <a:noFill/>
-          </a:ln>
-        </p:spPr>
-        <p:style>
-          <a:lnRef idx="1">
-            <a:schemeClr val="accent1"/>
-          </a:lnRef>
-          <a:fillRef idx="3">
-            <a:schemeClr val="accent1"/>
-          </a:fillRef>
-          <a:effectRef idx="2">
-            <a:schemeClr val="accent1"/>
-          </a:effectRef>
-          <a:fontRef idx="minor">
-            <a:schemeClr val="lt1"/>
-          </a:fontRef>
-        </p:style>
-        <p:txBody>
-          <a:bodyPr rtlCol="0" anchor="ctr"/>
-          <a:lstStyle/>
-          <a:p>
-            <a:pPr algn="ctr"/>
-          </a:p>
-        </p:txBody>
-      </p:sp>
-      <p:pic>
-        <p:nvPicPr>
-          <p:cNvPr id="5" name="Picture 4" descr="zeta_logo_1_20250828_233153_0c4ee81f.png"/>
-          <p:cNvPicPr>
-            <a:picLocks noChangeAspect="1"/>
-          </p:cNvPicPr>
-          <p:nvPr/>
-        </p:nvPicPr>
-        <p:blipFill>
-          <a:blip r:embed="rId2"/>
-          <a:stretch>
-            <a:fillRect/>
-          </a:stretch>
-        </p:blipFill>
-        <p:spPr>
-          <a:xfrm>
-            <a:off x="1143000" y="1943100"/>
-            <a:ext cx="1371600" cy="1485900"/>
-          </a:xfrm>
-          <a:prstGeom prst="rect">
-            <a:avLst/>
-          </a:prstGeom>
-        </p:spPr>
-      </p:pic>
-      <p:sp>
-        <p:nvSpPr>
-          <p:cNvPr id="6" name="TextBox 5"/>
-          <p:cNvSpPr txBox="1"/>
-          <p:nvPr/>
-        </p:nvSpPr>
-        <p:spPr>
-          <a:xfrm>
-            <a:off x="1143000" y="3429000"/>
-            <a:ext cx="1371600" cy="742950"/>
-          </a:xfrm>
-          <a:prstGeom prst="rect">
-            <a:avLst/>
-          </a:prstGeom>
-          <a:noFill/>
-        </p:spPr>
-        <p:txBody>
-          <a:bodyPr wrap="none">
-            <a:spAutoFit/>
-          </a:bodyPr>
-          <a:lstStyle/>
-          <a:p>
-            <a:pPr algn="ctr">
-              <a:defRPr sz="1200" b="0">
-                <a:solidFill>
-                  <a:srgbClr val="059669"/>
-                </a:solidFill>
-                <a:latin typeface="Source Sans Pro"/>
-              </a:defRPr>
-            </a:pPr>
-            <a:r>
-              <a:t>Version 1</a:t>
-            </a:r>
-          </a:p>
-        </p:txBody>
-      </p:sp>
-      <p:sp>
-        <p:nvSpPr>
-          <p:cNvPr id="7" name="Rectangle 6"/>
-          <p:cNvSpPr/>
-          <p:nvPr/>
-        </p:nvSpPr>
-        <p:spPr>
-          <a:xfrm>
-            <a:off x="3108960" y="1851660"/>
-            <a:ext cx="1554480" cy="1668780"/>
-          </a:xfrm>
-          <a:prstGeom prst="rect">
-            <a:avLst/>
-          </a:prstGeom>
-          <a:solidFill>
-            <a:srgbClr val="FFFFFF"/>
-          </a:solidFill>
-          <a:ln>
-            <a:noFill/>
-          </a:ln>
-        </p:spPr>
-        <p:style>
-          <a:lnRef idx="1">
-            <a:schemeClr val="accent1"/>
-          </a:lnRef>
-          <a:fillRef idx="3">
-            <a:schemeClr val="accent1"/>
-          </a:fillRef>
-          <a:effectRef idx="2">
-            <a:schemeClr val="accent1"/>
-          </a:effectRef>
-          <a:fontRef idx="minor">
-            <a:schemeClr val="lt1"/>
-          </a:fontRef>
-        </p:style>
-        <p:txBody>
-          <a:bodyPr rtlCol="0" anchor="ctr"/>
-          <a:lstStyle/>
-          <a:p>
-            <a:pPr algn="ctr"/>
-          </a:p>
-        </p:txBody>
-      </p:sp>
-      <p:pic>
-        <p:nvPicPr>
-          <p:cNvPr id="8" name="Picture 7" descr="zeta_logo_2_20250828_233213_61c6a3d4.png"/>
-          <p:cNvPicPr>
-            <a:picLocks noChangeAspect="1"/>
-          </p:cNvPicPr>
-          <p:nvPr/>
-        </p:nvPicPr>
-        <p:blipFill>
-          <a:blip r:embed="rId3"/>
-          <a:stretch>
-            <a:fillRect/>
-          </a:stretch>
-        </p:blipFill>
-        <p:spPr>
-          <a:xfrm>
-            <a:off x="3200400" y="1943100"/>
-            <a:ext cx="1371600" cy="1485900"/>
-          </a:xfrm>
-          <a:prstGeom prst="rect">
-            <a:avLst/>
-          </a:prstGeom>
-        </p:spPr>
-      </p:pic>
-      <p:sp>
-        <p:nvSpPr>
-          <p:cNvPr id="9" name="TextBox 8"/>
-          <p:cNvSpPr txBox="1"/>
-          <p:nvPr/>
-        </p:nvSpPr>
-        <p:spPr>
-          <a:xfrm>
-            <a:off x="3200400" y="3429000"/>
-            <a:ext cx="1371600" cy="742950"/>
-          </a:xfrm>
-          <a:prstGeom prst="rect">
-            <a:avLst/>
-          </a:prstGeom>
-          <a:noFill/>
-        </p:spPr>
-        <p:txBody>
-          <a:bodyPr wrap="none">
-            <a:spAutoFit/>
-          </a:bodyPr>
-          <a:lstStyle/>
-          <a:p>
-            <a:pPr algn="ctr">
-              <a:defRPr sz="1200" b="0">
-                <a:solidFill>
-                  <a:srgbClr val="059669"/>
-                </a:solidFill>
-                <a:latin typeface="Source Sans Pro"/>
-              </a:defRPr>
-            </a:pPr>
-            <a:r>
-              <a:t>Version 2</a:t>
-            </a:r>
-          </a:p>
-        </p:txBody>
-      </p:sp>
-      <p:sp>
-        <p:nvSpPr>
-          <p:cNvPr id="10" name="Rectangle 9"/>
-          <p:cNvSpPr/>
-          <p:nvPr/>
-        </p:nvSpPr>
-        <p:spPr>
-          <a:xfrm>
-            <a:off x="5166360" y="1851660"/>
-            <a:ext cx="1554480" cy="1668780"/>
-          </a:xfrm>
-          <a:prstGeom prst="rect">
-            <a:avLst/>
-          </a:prstGeom>
-          <a:solidFill>
-            <a:srgbClr val="FFFFFF"/>
-          </a:solidFill>
-          <a:ln>
-            <a:noFill/>
-          </a:ln>
-        </p:spPr>
-        <p:style>
-          <a:lnRef idx="1">
-            <a:schemeClr val="accent1"/>
-          </a:lnRef>
-          <a:fillRef idx="3">
-            <a:schemeClr val="accent1"/>
-          </a:fillRef>
-          <a:effectRef idx="2">
-            <a:schemeClr val="accent1"/>
-          </a:effectRef>
-          <a:fontRef idx="minor">
-            <a:schemeClr val="lt1"/>
-          </a:fontRef>
-        </p:style>
-        <p:txBody>
-          <a:bodyPr rtlCol="0" anchor="ctr"/>
-          <a:lstStyle/>
-          <a:p>
-            <a:pPr algn="ctr"/>
-          </a:p>
-        </p:txBody>
-      </p:sp>
-      <p:pic>
-        <p:nvPicPr>
-          <p:cNvPr id="11" name="Picture 10" descr="zeta_logo_3_20250828_233235_388d8093.png"/>
-          <p:cNvPicPr>
-            <a:picLocks noChangeAspect="1"/>
-          </p:cNvPicPr>
-          <p:nvPr/>
-        </p:nvPicPr>
-        <p:blipFill>
-          <a:blip r:embed="rId4"/>
-          <a:stretch>
-            <a:fillRect/>
-          </a:stretch>
-        </p:blipFill>
-        <p:spPr>
-          <a:xfrm>
-            <a:off x="5257800" y="1943100"/>
-            <a:ext cx="1371600" cy="1485900"/>
-          </a:xfrm>
-          <a:prstGeom prst="rect">
-            <a:avLst/>
-          </a:prstGeom>
-        </p:spPr>
-      </p:pic>
-      <p:sp>
-        <p:nvSpPr>
-          <p:cNvPr id="12" name="TextBox 11"/>
-          <p:cNvSpPr txBox="1"/>
-          <p:nvPr/>
-        </p:nvSpPr>
-        <p:spPr>
-          <a:xfrm>
-            <a:off x="5257800" y="3429000"/>
-            <a:ext cx="1371600" cy="742950"/>
-          </a:xfrm>
-          <a:prstGeom prst="rect">
-            <a:avLst/>
-          </a:prstGeom>
-          <a:noFill/>
-        </p:spPr>
-        <p:txBody>
-          <a:bodyPr wrap="none">
-            <a:spAutoFit/>
-          </a:bodyPr>
-          <a:lstStyle/>
-          <a:p>
-            <a:pPr algn="ctr">
-              <a:defRPr sz="1200" b="0">
-                <a:solidFill>
-                  <a:srgbClr val="059669"/>
-                </a:solidFill>
-                <a:latin typeface="Source Sans Pro"/>
-              </a:defRPr>
-            </a:pPr>
-            <a:r>
-              <a:t>Version 3</a:t>
-            </a:r>
-          </a:p>
-        </p:txBody>
-      </p:sp>
-      <p:sp>
-        <p:nvSpPr>
-          <p:cNvPr id="13" name="TextBox 12"/>
-          <p:cNvSpPr txBox="1"/>
-          <p:nvPr/>
-        </p:nvSpPr>
-        <p:spPr>
-          <a:xfrm>
-            <a:off x="1143000" y="4914900"/>
-            <a:ext cx="7543800" cy="742950"/>
-          </a:xfrm>
-          <a:prstGeom prst="rect">
-            <a:avLst/>
-          </a:prstGeom>
-          <a:noFill/>
-        </p:spPr>
-        <p:txBody>
-          <a:bodyPr wrap="none">
-            <a:spAutoFit/>
-          </a:bodyPr>
-          <a:lstStyle/>
-          <a:p>
-            <a:pPr algn="ctr">
-              <a:defRPr sz="1200" b="0">
-                <a:solidFill>
-                  <a:srgbClr val="059669"/>
-                </a:solidFill>
-                <a:latin typeface="Source Sans Pro"/>
-              </a:defRPr>
-            </a:pPr>
-            <a:r>
-              <a:t>Minimum size: 0.5 inches • Clearspace: 0.25 inches on all sides</a:t>
-            </a:r>
-          </a:p>
-        </p:txBody>
-      </p:sp>
-      <p:sp>
-        <p:nvSpPr>
-          <p:cNvPr id="14" name="TextBox 13"/>
-          <p:cNvSpPr txBox="1"/>
-          <p:nvPr/>
-        </p:nvSpPr>
-        <p:spPr>
-          <a:xfrm>
-            <a:off x="457200" y="5657850"/>
-            <a:ext cx="4114800" cy="742950"/>
-          </a:xfrm>
-          <a:prstGeom prst="rect">
-            <a:avLst/>
-          </a:prstGeom>
-          <a:noFill/>
-        </p:spPr>
-        <p:txBody>
-          <a:bodyPr wrap="none">
-            <a:spAutoFit/>
-          </a:bodyPr>
-          <a:lstStyle/>
-          <a:p>
-            <a:pPr algn="l">
-              <a:defRPr sz="1000" b="0">
-                <a:solidFill>
-                  <a:srgbClr val="059669"/>
-                </a:solidFill>
-                <a:latin typeface="Source Sans Pro"/>
-              </a:defRPr>
-            </a:pPr>
-            <a:r>
-              <a:t>Zeta</a:t>
-            </a:r>
-          </a:p>
-        </p:txBody>
-      </p:sp>
-      <p:sp>
-        <p:nvSpPr>
-          <p:cNvPr id="15" name="TextBox 14"/>
-          <p:cNvSpPr txBox="1"/>
-          <p:nvPr/>
-        </p:nvSpPr>
-        <p:spPr>
-          <a:xfrm>
-            <a:off x="4572000" y="5657850"/>
-            <a:ext cx="4114800" cy="742950"/>
-          </a:xfrm>
-          <a:prstGeom prst="rect">
-            <a:avLst/>
-          </a:prstGeom>
-          <a:noFill/>
-        </p:spPr>
-        <p:txBody>
-          <a:bodyPr wrap="none">
-            <a:spAutoFit/>
-          </a:bodyPr>
-          <a:lstStyle/>
-          <a:p>
-            <a:pPr algn="r">
-              <a:defRPr sz="1000" b="0">
-                <a:solidFill>
-                  <a:srgbClr val="059669"/>
-                </a:solidFill>
-                <a:latin typeface="Source Sans Pro"/>
-              </a:defRPr>
-            </a:pPr>
-            <a:r>
-              <a:t>8</a:t>
+              <a:t>BRAND STORY (2/2)</a:t>
             </a:r>
           </a:p>
         </p:txBody>
@@ -7115,7 +7507,7 @@
               </a:defRPr>
             </a:pPr>
             <a:r>
-              <a:t>Color Palette</a:t>
+              <a:t>Logo Variations (3 designs)</a:t>
             </a:r>
           </a:p>
         </p:txBody>
@@ -7128,19 +7520,17 @@
         </p:nvSpPr>
         <p:spPr>
           <a:xfrm>
-            <a:off x="1143000" y="1943100"/>
-            <a:ext cx="2057400" cy="1485900"/>
+            <a:off x="1051560" y="1851660"/>
+            <a:ext cx="1554480" cy="1668780"/>
           </a:xfrm>
           <a:prstGeom prst="rect">
             <a:avLst/>
           </a:prstGeom>
           <a:solidFill>
-            <a:srgbClr val="059669"/>
+            <a:srgbClr val="FFFFFF"/>
           </a:solidFill>
-          <a:ln w="12700">
-            <a:solidFill>
-              <a:srgbClr val="FFFFFF"/>
-            </a:solidFill>
+          <a:ln>
+            <a:noFill/>
           </a:ln>
         </p:spPr>
         <p:style>
@@ -7165,16 +7555,40 @@
           </a:p>
         </p:txBody>
       </p:sp>
-      <p:sp>
-        <p:nvSpPr>
-          <p:cNvPr id="5" name="TextBox 4"/>
+      <p:pic>
+        <p:nvPicPr>
+          <p:cNvPr id="5" name="Picture 4" descr="zeta_logo_1_20250828_235333_3e1fde11.png"/>
+          <p:cNvPicPr>
+            <a:picLocks noChangeAspect="1"/>
+          </p:cNvPicPr>
+          <p:nvPr/>
+        </p:nvPicPr>
+        <p:blipFill>
+          <a:blip r:embed="rId2"/>
+          <a:stretch>
+            <a:fillRect/>
+          </a:stretch>
+        </p:blipFill>
+        <p:spPr>
+          <a:xfrm>
+            <a:off x="1143000" y="1943100"/>
+            <a:ext cx="1371600" cy="1485900"/>
+          </a:xfrm>
+          <a:prstGeom prst="rect">
+            <a:avLst/>
+          </a:prstGeom>
+        </p:spPr>
+      </p:pic>
+      <p:sp>
+        <p:nvSpPr>
+          <p:cNvPr id="6" name="TextBox 5"/>
           <p:cNvSpPr txBox="1"/>
           <p:nvPr/>
         </p:nvSpPr>
         <p:spPr>
           <a:xfrm>
             <a:off x="1143000" y="3429000"/>
-            <a:ext cx="2057400" cy="1485900"/>
+            <a:ext cx="1371600" cy="742950"/>
           </a:xfrm>
           <a:prstGeom prst="rect">
             <a:avLst/>
@@ -7182,13 +7596,13 @@
           <a:noFill/>
         </p:spPr>
         <p:txBody>
-          <a:bodyPr wrap="square">
+          <a:bodyPr wrap="none">
             <a:spAutoFit/>
           </a:bodyPr>
           <a:lstStyle/>
           <a:p>
-            <a:pPr>
-              <a:defRPr sz="1000" b="0">
+            <a:pPr algn="ctr">
+              <a:defRPr sz="1200" b="0">
                 <a:solidFill>
                   <a:srgbClr val="059669"/>
                 </a:solidFill>
@@ -7196,84 +7610,30 @@
               </a:defRPr>
             </a:pPr>
             <a:r>
-              <a:t>Primary</a:t>
-            </a:r>
-          </a:p>
-          <a:p>
-            <a:pPr>
-              <a:defRPr sz="1000" b="0">
-                <a:solidFill>
-                  <a:srgbClr val="059669"/>
-                </a:solidFill>
-                <a:latin typeface="Source Sans Pro"/>
-              </a:defRPr>
-            </a:pPr>
-            <a:r>
-              <a:t>#059669</a:t>
-            </a:r>
-          </a:p>
-          <a:p>
-            <a:pPr>
-              <a:defRPr sz="1000" b="0">
-                <a:solidFill>
-                  <a:srgbClr val="059669"/>
-                </a:solidFill>
-                <a:latin typeface="Source Sans Pro"/>
-              </a:defRPr>
-            </a:pPr>
-            <a:r>
-              <a:t>RGB(5, 150, 105)</a:t>
-            </a:r>
-          </a:p>
-          <a:p>
-            <a:pPr>
-              <a:defRPr sz="1000" b="0">
-                <a:solidFill>
-                  <a:srgbClr val="059669"/>
-                </a:solidFill>
-                <a:latin typeface="Source Sans Pro"/>
-              </a:defRPr>
-            </a:pPr>
-            <a:r>
-              <a:t>CMYK(96, 0, 30, 41)</a:t>
-            </a:r>
-          </a:p>
-          <a:p>
-            <a:pPr>
-              <a:defRPr sz="1000" b="0">
-                <a:solidFill>
-                  <a:srgbClr val="059669"/>
-                </a:solidFill>
-                <a:latin typeface="Source Sans Pro"/>
-              </a:defRPr>
-            </a:pPr>
-            <a:r>
-              <a:t>Use Light Text</a:t>
-            </a:r>
-          </a:p>
-        </p:txBody>
-      </p:sp>
-      <p:sp>
-        <p:nvSpPr>
-          <p:cNvPr id="6" name="Rectangle 5"/>
+              <a:t>Version 1</a:t>
+            </a:r>
+          </a:p>
+        </p:txBody>
+      </p:sp>
+      <p:sp>
+        <p:nvSpPr>
+          <p:cNvPr id="7" name="Rectangle 6"/>
           <p:cNvSpPr/>
           <p:nvPr/>
         </p:nvSpPr>
         <p:spPr>
           <a:xfrm>
-            <a:off x="3886200" y="1943100"/>
-            <a:ext cx="2057400" cy="1485900"/>
+            <a:off x="3108960" y="1851660"/>
+            <a:ext cx="1554480" cy="1668780"/>
           </a:xfrm>
           <a:prstGeom prst="rect">
             <a:avLst/>
           </a:prstGeom>
           <a:solidFill>
-            <a:srgbClr val="6D28D9"/>
+            <a:srgbClr val="FFFFFF"/>
           </a:solidFill>
-          <a:ln w="12700">
-            <a:solidFill>
-              <a:srgbClr val="FFFFFF"/>
-            </a:solidFill>
+          <a:ln>
+            <a:noFill/>
           </a:ln>
         </p:spPr>
         <p:style>
@@ -7298,16 +7658,40 @@
           </a:p>
         </p:txBody>
       </p:sp>
-      <p:sp>
-        <p:nvSpPr>
-          <p:cNvPr id="7" name="TextBox 6"/>
+      <p:pic>
+        <p:nvPicPr>
+          <p:cNvPr id="8" name="Picture 7" descr="zeta_logo_2_20250828_235352_a3259202.png"/>
+          <p:cNvPicPr>
+            <a:picLocks noChangeAspect="1"/>
+          </p:cNvPicPr>
+          <p:nvPr/>
+        </p:nvPicPr>
+        <p:blipFill>
+          <a:blip r:embed="rId3"/>
+          <a:stretch>
+            <a:fillRect/>
+          </a:stretch>
+        </p:blipFill>
+        <p:spPr>
+          <a:xfrm>
+            <a:off x="3200400" y="1943100"/>
+            <a:ext cx="1371600" cy="1485900"/>
+          </a:xfrm>
+          <a:prstGeom prst="rect">
+            <a:avLst/>
+          </a:prstGeom>
+        </p:spPr>
+      </p:pic>
+      <p:sp>
+        <p:nvSpPr>
+          <p:cNvPr id="9" name="TextBox 8"/>
           <p:cNvSpPr txBox="1"/>
           <p:nvPr/>
         </p:nvSpPr>
         <p:spPr>
           <a:xfrm>
-            <a:off x="3886200" y="3429000"/>
-            <a:ext cx="2057400" cy="1485900"/>
+            <a:off x="3200400" y="3429000"/>
+            <a:ext cx="1371600" cy="742950"/>
           </a:xfrm>
           <a:prstGeom prst="rect">
             <a:avLst/>
@@ -7315,13 +7699,13 @@
           <a:noFill/>
         </p:spPr>
         <p:txBody>
-          <a:bodyPr wrap="square">
+          <a:bodyPr wrap="none">
             <a:spAutoFit/>
           </a:bodyPr>
           <a:lstStyle/>
           <a:p>
-            <a:pPr>
-              <a:defRPr sz="1000" b="0">
+            <a:pPr algn="ctr">
+              <a:defRPr sz="1200" b="0">
                 <a:solidFill>
                   <a:srgbClr val="059669"/>
                 </a:solidFill>
@@ -7329,84 +7713,30 @@
               </a:defRPr>
             </a:pPr>
             <a:r>
-              <a:t>Secondary</a:t>
-            </a:r>
-          </a:p>
-          <a:p>
-            <a:pPr>
-              <a:defRPr sz="1000" b="0">
-                <a:solidFill>
-                  <a:srgbClr val="059669"/>
-                </a:solidFill>
-                <a:latin typeface="Source Sans Pro"/>
-              </a:defRPr>
-            </a:pPr>
-            <a:r>
-              <a:t>#6D28D9</a:t>
-            </a:r>
-          </a:p>
-          <a:p>
-            <a:pPr>
-              <a:defRPr sz="1000" b="0">
-                <a:solidFill>
-                  <a:srgbClr val="059669"/>
-                </a:solidFill>
-                <a:latin typeface="Source Sans Pro"/>
-              </a:defRPr>
-            </a:pPr>
-            <a:r>
-              <a:t>RGB(109, 40, 217)</a:t>
-            </a:r>
-          </a:p>
-          <a:p>
-            <a:pPr>
-              <a:defRPr sz="1000" b="0">
-                <a:solidFill>
-                  <a:srgbClr val="059669"/>
-                </a:solidFill>
-                <a:latin typeface="Source Sans Pro"/>
-              </a:defRPr>
-            </a:pPr>
-            <a:r>
-              <a:t>CMYK(49, 81, 0, 14)</a:t>
-            </a:r>
-          </a:p>
-          <a:p>
-            <a:pPr>
-              <a:defRPr sz="1000" b="0">
-                <a:solidFill>
-                  <a:srgbClr val="059669"/>
-                </a:solidFill>
-                <a:latin typeface="Source Sans Pro"/>
-              </a:defRPr>
-            </a:pPr>
-            <a:r>
-              <a:t>Use Light Text</a:t>
-            </a:r>
-          </a:p>
-        </p:txBody>
-      </p:sp>
-      <p:sp>
-        <p:nvSpPr>
-          <p:cNvPr id="8" name="Rectangle 7"/>
+              <a:t>Version 2</a:t>
+            </a:r>
+          </a:p>
+        </p:txBody>
+      </p:sp>
+      <p:sp>
+        <p:nvSpPr>
+          <p:cNvPr id="10" name="Rectangle 9"/>
           <p:cNvSpPr/>
           <p:nvPr/>
         </p:nvSpPr>
         <p:spPr>
           <a:xfrm>
-            <a:off x="6629400" y="1943100"/>
-            <a:ext cx="2057400" cy="1485900"/>
+            <a:off x="5166360" y="1851660"/>
+            <a:ext cx="1554480" cy="1668780"/>
           </a:xfrm>
           <a:prstGeom prst="rect">
             <a:avLst/>
           </a:prstGeom>
           <a:solidFill>
-            <a:srgbClr val="3B82F6"/>
+            <a:srgbClr val="FFFFFF"/>
           </a:solidFill>
-          <a:ln w="12700">
-            <a:solidFill>
-              <a:srgbClr val="FFFFFF"/>
-            </a:solidFill>
+          <a:ln>
+            <a:noFill/>
           </a:ln>
         </p:spPr>
         <p:style>
@@ -7431,16 +7761,40 @@
           </a:p>
         </p:txBody>
       </p:sp>
-      <p:sp>
-        <p:nvSpPr>
-          <p:cNvPr id="9" name="TextBox 8"/>
+      <p:pic>
+        <p:nvPicPr>
+          <p:cNvPr id="11" name="Picture 10" descr="zeta_logo_3_20250828_235415_054bae29.png"/>
+          <p:cNvPicPr>
+            <a:picLocks noChangeAspect="1"/>
+          </p:cNvPicPr>
+          <p:nvPr/>
+        </p:nvPicPr>
+        <p:blipFill>
+          <a:blip r:embed="rId4"/>
+          <a:stretch>
+            <a:fillRect/>
+          </a:stretch>
+        </p:blipFill>
+        <p:spPr>
+          <a:xfrm>
+            <a:off x="5257800" y="1943100"/>
+            <a:ext cx="1371600" cy="1485900"/>
+          </a:xfrm>
+          <a:prstGeom prst="rect">
+            <a:avLst/>
+          </a:prstGeom>
+        </p:spPr>
+      </p:pic>
+      <p:sp>
+        <p:nvSpPr>
+          <p:cNvPr id="12" name="TextBox 11"/>
           <p:cNvSpPr txBox="1"/>
           <p:nvPr/>
         </p:nvSpPr>
         <p:spPr>
           <a:xfrm>
-            <a:off x="6629400" y="3429000"/>
-            <a:ext cx="2057400" cy="1485900"/>
+            <a:off x="5257800" y="3429000"/>
+            <a:ext cx="1371600" cy="742950"/>
           </a:xfrm>
           <a:prstGeom prst="rect">
             <a:avLst/>
@@ -7448,13 +7802,13 @@
           <a:noFill/>
         </p:spPr>
         <p:txBody>
-          <a:bodyPr wrap="square">
+          <a:bodyPr wrap="none">
             <a:spAutoFit/>
           </a:bodyPr>
           <a:lstStyle/>
           <a:p>
-            <a:pPr>
-              <a:defRPr sz="1000" b="0">
+            <a:pPr algn="ctr">
+              <a:defRPr sz="1200" b="0">
                 <a:solidFill>
                   <a:srgbClr val="059669"/>
                 </a:solidFill>
@@ -7462,118 +7816,21 @@
               </a:defRPr>
             </a:pPr>
             <a:r>
-              <a:t>Accent</a:t>
-            </a:r>
-          </a:p>
-          <a:p>
-            <a:pPr>
-              <a:defRPr sz="1000" b="0">
-                <a:solidFill>
-                  <a:srgbClr val="059669"/>
-                </a:solidFill>
-                <a:latin typeface="Source Sans Pro"/>
-              </a:defRPr>
-            </a:pPr>
-            <a:r>
-              <a:t>#3B82F6</a:t>
-            </a:r>
-          </a:p>
-          <a:p>
-            <a:pPr>
-              <a:defRPr sz="1000" b="0">
-                <a:solidFill>
-                  <a:srgbClr val="059669"/>
-                </a:solidFill>
-                <a:latin typeface="Source Sans Pro"/>
-              </a:defRPr>
-            </a:pPr>
-            <a:r>
-              <a:t>RGB(59, 130, 246)</a:t>
-            </a:r>
-          </a:p>
-          <a:p>
-            <a:pPr>
-              <a:defRPr sz="1000" b="0">
-                <a:solidFill>
-                  <a:srgbClr val="059669"/>
-                </a:solidFill>
-                <a:latin typeface="Source Sans Pro"/>
-              </a:defRPr>
-            </a:pPr>
-            <a:r>
-              <a:t>CMYK(76, 47, 0, 3)</a:t>
-            </a:r>
-          </a:p>
-          <a:p>
-            <a:pPr>
-              <a:defRPr sz="1000" b="0">
-                <a:solidFill>
-                  <a:srgbClr val="059669"/>
-                </a:solidFill>
-                <a:latin typeface="Source Sans Pro"/>
-              </a:defRPr>
-            </a:pPr>
-            <a:r>
-              <a:t>Use Dark Text</a:t>
-            </a:r>
-          </a:p>
-        </p:txBody>
-      </p:sp>
-      <p:sp>
-        <p:nvSpPr>
-          <p:cNvPr id="10" name="Rectangle 9"/>
-          <p:cNvSpPr/>
-          <p:nvPr/>
-        </p:nvSpPr>
-        <p:spPr>
-          <a:xfrm>
-            <a:off x="1143000" y="5657850"/>
-            <a:ext cx="2057400" cy="1485900"/>
-          </a:xfrm>
-          <a:prstGeom prst="rect">
-            <a:avLst/>
-          </a:prstGeom>
-          <a:solidFill>
-            <a:srgbClr val="065F46"/>
-          </a:solidFill>
-          <a:ln w="12700">
-            <a:solidFill>
-              <a:srgbClr val="FFFFFF"/>
-            </a:solidFill>
-          </a:ln>
-        </p:spPr>
-        <p:style>
-          <a:lnRef idx="1">
-            <a:schemeClr val="accent1"/>
-          </a:lnRef>
-          <a:fillRef idx="3">
-            <a:schemeClr val="accent1"/>
-          </a:fillRef>
-          <a:effectRef idx="2">
-            <a:schemeClr val="accent1"/>
-          </a:effectRef>
-          <a:fontRef idx="minor">
-            <a:schemeClr val="lt1"/>
-          </a:fontRef>
-        </p:style>
-        <p:txBody>
-          <a:bodyPr rtlCol="0" anchor="ctr"/>
-          <a:lstStyle/>
-          <a:p>
-            <a:pPr algn="ctr"/>
-          </a:p>
-        </p:txBody>
-      </p:sp>
-      <p:sp>
-        <p:nvSpPr>
-          <p:cNvPr id="11" name="TextBox 10"/>
+              <a:t>Version 3</a:t>
+            </a:r>
+          </a:p>
+        </p:txBody>
+      </p:sp>
+      <p:sp>
+        <p:nvSpPr>
+          <p:cNvPr id="13" name="TextBox 12"/>
           <p:cNvSpPr txBox="1"/>
           <p:nvPr/>
         </p:nvSpPr>
         <p:spPr>
           <a:xfrm>
-            <a:off x="1143000" y="7143750"/>
-            <a:ext cx="2057400" cy="1485900"/>
+            <a:off x="1143000" y="4914900"/>
+            <a:ext cx="7543800" cy="742950"/>
           </a:xfrm>
           <a:prstGeom prst="rect">
             <a:avLst/>
@@ -7581,13 +7838,13 @@
           <a:noFill/>
         </p:spPr>
         <p:txBody>
-          <a:bodyPr wrap="square">
+          <a:bodyPr wrap="none">
             <a:spAutoFit/>
           </a:bodyPr>
           <a:lstStyle/>
           <a:p>
-            <a:pPr>
-              <a:defRPr sz="1000" b="0">
+            <a:pPr algn="ctr">
+              <a:defRPr sz="1200" b="0">
                 <a:solidFill>
                   <a:srgbClr val="059669"/>
                 </a:solidFill>
@@ -7595,192 +7852,7 @@
               </a:defRPr>
             </a:pPr>
             <a:r>
-              <a:t>Supporting</a:t>
-            </a:r>
-          </a:p>
-          <a:p>
-            <a:pPr>
-              <a:defRPr sz="1000" b="0">
-                <a:solidFill>
-                  <a:srgbClr val="059669"/>
-                </a:solidFill>
-                <a:latin typeface="Source Sans Pro"/>
-              </a:defRPr>
-            </a:pPr>
-            <a:r>
-              <a:t>#065F46</a:t>
-            </a:r>
-          </a:p>
-          <a:p>
-            <a:pPr>
-              <a:defRPr sz="1000" b="0">
-                <a:solidFill>
-                  <a:srgbClr val="059669"/>
-                </a:solidFill>
-                <a:latin typeface="Source Sans Pro"/>
-              </a:defRPr>
-            </a:pPr>
-            <a:r>
-              <a:t>RGB(6, 95, 70)</a:t>
-            </a:r>
-          </a:p>
-          <a:p>
-            <a:pPr>
-              <a:defRPr sz="1000" b="0">
-                <a:solidFill>
-                  <a:srgbClr val="059669"/>
-                </a:solidFill>
-                <a:latin typeface="Source Sans Pro"/>
-              </a:defRPr>
-            </a:pPr>
-            <a:r>
-              <a:t>CMYK(93, 0, 26, 62)</a:t>
-            </a:r>
-          </a:p>
-          <a:p>
-            <a:pPr>
-              <a:defRPr sz="1000" b="0">
-                <a:solidFill>
-                  <a:srgbClr val="059669"/>
-                </a:solidFill>
-                <a:latin typeface="Source Sans Pro"/>
-              </a:defRPr>
-            </a:pPr>
-            <a:r>
-              <a:t>Use Light Text</a:t>
-            </a:r>
-          </a:p>
-        </p:txBody>
-      </p:sp>
-      <p:sp>
-        <p:nvSpPr>
-          <p:cNvPr id="12" name="Rectangle 11"/>
-          <p:cNvSpPr/>
-          <p:nvPr/>
-        </p:nvSpPr>
-        <p:spPr>
-          <a:xfrm>
-            <a:off x="3886200" y="5657850"/>
-            <a:ext cx="2057400" cy="1485900"/>
-          </a:xfrm>
-          <a:prstGeom prst="rect">
-            <a:avLst/>
-          </a:prstGeom>
-          <a:solidFill>
-            <a:srgbClr val="059669"/>
-          </a:solidFill>
-          <a:ln w="12700">
-            <a:solidFill>
-              <a:srgbClr val="FFFFFF"/>
-            </a:solidFill>
-          </a:ln>
-        </p:spPr>
-        <p:style>
-          <a:lnRef idx="1">
-            <a:schemeClr val="accent1"/>
-          </a:lnRef>
-          <a:fillRef idx="3">
-            <a:schemeClr val="accent1"/>
-          </a:fillRef>
-          <a:effectRef idx="2">
-            <a:schemeClr val="accent1"/>
-          </a:effectRef>
-          <a:fontRef idx="minor">
-            <a:schemeClr val="lt1"/>
-          </a:fontRef>
-        </p:style>
-        <p:txBody>
-          <a:bodyPr rtlCol="0" anchor="ctr"/>
-          <a:lstStyle/>
-          <a:p>
-            <a:pPr algn="ctr"/>
-          </a:p>
-        </p:txBody>
-      </p:sp>
-      <p:sp>
-        <p:nvSpPr>
-          <p:cNvPr id="13" name="TextBox 12"/>
-          <p:cNvSpPr txBox="1"/>
-          <p:nvPr/>
-        </p:nvSpPr>
-        <p:spPr>
-          <a:xfrm>
-            <a:off x="3886200" y="7143750"/>
-            <a:ext cx="2057400" cy="1485900"/>
-          </a:xfrm>
-          <a:prstGeom prst="rect">
-            <a:avLst/>
-          </a:prstGeom>
-          <a:noFill/>
-        </p:spPr>
-        <p:txBody>
-          <a:bodyPr wrap="square">
-            <a:spAutoFit/>
-          </a:bodyPr>
-          <a:lstStyle/>
-          <a:p>
-            <a:pPr>
-              <a:defRPr sz="1000" b="0">
-                <a:solidFill>
-                  <a:srgbClr val="059669"/>
-                </a:solidFill>
-                <a:latin typeface="Source Sans Pro"/>
-              </a:defRPr>
-            </a:pPr>
-            <a:r>
-              <a:t>Hex_Codes</a:t>
-            </a:r>
-          </a:p>
-          <a:p>
-            <a:pPr>
-              <a:defRPr sz="1000" b="0">
-                <a:solidFill>
-                  <a:srgbClr val="059669"/>
-                </a:solidFill>
-                <a:latin typeface="Source Sans Pro"/>
-              </a:defRPr>
-            </a:pPr>
-            <a:r>
-              <a:t>#059669</a:t>
-            </a:r>
-          </a:p>
-          <a:p>
-            <a:pPr>
-              <a:defRPr sz="1000" b="0">
-                <a:solidFill>
-                  <a:srgbClr val="059669"/>
-                </a:solidFill>
-                <a:latin typeface="Source Sans Pro"/>
-              </a:defRPr>
-            </a:pPr>
-            <a:r>
-              <a:t>RGB(5, 150, 105)</a:t>
-            </a:r>
-          </a:p>
-          <a:p>
-            <a:pPr>
-              <a:defRPr sz="1000" b="0">
-                <a:solidFill>
-                  <a:srgbClr val="059669"/>
-                </a:solidFill>
-                <a:latin typeface="Source Sans Pro"/>
-              </a:defRPr>
-            </a:pPr>
-            <a:r>
-              <a:t>CMYK(96, 0, 30, 41)</a:t>
-            </a:r>
-          </a:p>
-          <a:p>
-            <a:pPr>
-              <a:defRPr sz="1000" b="0">
-                <a:solidFill>
-                  <a:srgbClr val="059669"/>
-                </a:solidFill>
-                <a:latin typeface="Source Sans Pro"/>
-              </a:defRPr>
-            </a:pPr>
-            <a:r>
-              <a:t>Use Light Text</a:t>
+              <a:t>Minimum size: 0.5 inches • Clearspace: 0.25 inches on all sides</a:t>
             </a:r>
           </a:p>
         </p:txBody>
